--- a/public/templates/saas-b2b.pptx
+++ b/public/templates/saas-b2b.pptx
@@ -17,10 +17,9 @@
     <p:sldId id="265" r:id="rId11"/>
     <p:sldId id="266" r:id="rId12"/>
     <p:sldId id="267" r:id="rId13"/>
-    <p:sldId id="268" r:id="rId14"/>
   </p:sldIdLst>
   <p:notesMasterIdLst>
-    <p:notesMasterId r:id="rId15"/>
+    <p:notesMasterId r:id="rId14"/>
   </p:notesMasterIdLst>
   <p:sldSz cx="9144000" cy="5143500"/>
   <p:notesSz cx="5143500" cy="9144000"/>
@@ -602,12 +601,7 @@
           <a:p>
             <a:r>
               <a:rPr lang="en-US" dirty="0"/>
-              <a:t>Instructions for "Go-to-Market" slide:
-Sales channels
-Customer acquisition strategy
-Sales cycle length
-Expansion strategy
-Replace this content with your own information.</a:t>
+              <a:t/>
             </a:r>
             <a:endParaRPr lang="en-US" dirty="0"/>
           </a:p>
@@ -695,12 +689,7 @@
           <a:p>
             <a:r>
               <a:rPr lang="en-US" dirty="0"/>
-              <a:t>Instructions for "Competition" slide:
-Competitive landscape
-Positioning matrix
-Differentiation
-Switching costs
-Replace this content with your own information.</a:t>
+              <a:t/>
             </a:r>
             <a:endParaRPr lang="en-US" dirty="0"/>
           </a:p>
@@ -788,12 +777,7 @@
           <a:p>
             <a:r>
               <a:rPr lang="en-US" dirty="0"/>
-              <a:t>Instructions for "Team" slide:
-Founders with B2B background
-Previous enterprise sales
-Technical leadership
-Advisory board
-Replace this content with your own information.</a:t>
+              <a:t/>
             </a:r>
             <a:endParaRPr lang="en-US" dirty="0"/>
           </a:p>
@@ -817,101 +801,6 @@
             <a:fld id="{F7021451-1387-4CA6-816F-3879F97B5CBC}" type="slidenum">
               <a:rPr lang="en-US"/>
               <a:t>12</a:t>
-            </a:fld>
-            <a:endParaRPr lang="en-US"/>
-          </a:p>
-        </p:txBody>
-      </p:sp>
-    </p:spTree>
-    <p:extLst>
-      <p:ext uri="{BB962C8B-B14F-4D97-AF65-F5344CB8AC3E}">
-        <p14:creationId xmlns:p14="http://schemas.microsoft.com/office/powerpoint/2010/main" val="1024086991"/>
-      </p:ext>
-    </p:extLst>
-  </p:cSld>
-  <p:clrMapOvr>
-    <a:masterClrMapping/>
-  </p:clrMapOvr>
-</p:notes>
-</file>
-
-<file path=ppt/notesSlides/notesSlide13.xml><?xml version="1.0" encoding="utf-8"?>
-<p:notes xmlns:a="http://schemas.openxmlformats.org/drawingml/2006/main" xmlns:r="http://schemas.openxmlformats.org/officeDocument/2006/relationships" xmlns:p="http://schemas.openxmlformats.org/presentationml/2006/main">
-  <p:cSld>
-    <p:spTree>
-      <p:nvGrpSpPr>
-        <p:cNvPr id="1" name=""/>
-        <p:cNvGrpSpPr/>
-        <p:nvPr/>
-      </p:nvGrpSpPr>
-      <p:grpSpPr>
-        <a:xfrm>
-          <a:off x="0" y="0"/>
-          <a:ext cx="0" cy="0"/>
-          <a:chOff x="0" y="0"/>
-          <a:chExt cx="0" cy="0"/>
-        </a:xfrm>
-      </p:grpSpPr>
-      <p:sp>
-        <p:nvSpPr>
-          <p:cNvPr id="2" name="Slide Image Placeholder 1"/>
-          <p:cNvSpPr>
-            <a:spLocks noGrp="1" noRot="1" noChangeAspect="1"/>
-          </p:cNvSpPr>
-          <p:nvPr>
-            <p:ph type="sldImg"/>
-          </p:nvPr>
-        </p:nvSpPr>
-        <p:spPr/>
-      </p:sp>
-      <p:sp>
-        <p:nvSpPr>
-          <p:cNvPr id="3" name="Notes Placeholder 2"/>
-          <p:cNvSpPr>
-            <a:spLocks noGrp="1"/>
-          </p:cNvSpPr>
-          <p:nvPr>
-            <p:ph type="body" idx="1"/>
-          </p:nvPr>
-        </p:nvSpPr>
-        <p:spPr/>
-        <p:txBody>
-          <a:bodyPr/>
-          <a:lstStyle/>
-          <a:p>
-            <a:r>
-              <a:rPr lang="en-US" dirty="0"/>
-              <a:t>Instructions for "Financials &amp; Ask" slide:
-Current ARR
-Growth trajectory
-Unit economics
-Raise amount
-Use of funds
-Path to profitability
-Replace this content with your own information.</a:t>
-            </a:r>
-            <a:endParaRPr lang="en-US" dirty="0"/>
-          </a:p>
-        </p:txBody>
-      </p:sp>
-      <p:sp>
-        <p:nvSpPr>
-          <p:cNvPr id="4" name="Slide Number Placeholder 3"/>
-          <p:cNvSpPr>
-            <a:spLocks noGrp="1"/>
-          </p:cNvSpPr>
-          <p:nvPr>
-            <p:ph type="sldNum" sz="quarter" idx="10"/>
-          </p:nvPr>
-        </p:nvSpPr>
-        <p:spPr/>
-        <p:txBody>
-          <a:bodyPr/>
-          <a:lstStyle/>
-          <a:p>
-            <a:fld id="{F7021451-1387-4CA6-816F-3879F97B5CBC}" type="slidenum">
-              <a:rPr lang="en-US"/>
-              <a:t>13</a:t>
             </a:fld>
             <a:endParaRPr lang="en-US"/>
           </a:p>
@@ -976,12 +865,7 @@
           <a:p>
             <a:r>
               <a:rPr lang="en-US" dirty="0"/>
-              <a:t>Instructions for "Cover Slide" slide:
-Company name
-Value proposition
-Founded year
-Contact info
-Replace this content with your own information.</a:t>
+              <a:t/>
             </a:r>
             <a:endParaRPr lang="en-US" dirty="0"/>
           </a:p>
@@ -1069,12 +953,7 @@
           <a:p>
             <a:r>
               <a:rPr lang="en-US" dirty="0"/>
-              <a:t>Instructions for "Problem" slide:
-Business problem you solve
-Cost of the problem
-Who in organization feels it
-Current inadequate solutions
-Replace this content with your own information.</a:t>
+              <a:t/>
             </a:r>
             <a:endParaRPr lang="en-US" dirty="0"/>
           </a:p>
@@ -1162,12 +1041,7 @@
           <a:p>
             <a:r>
               <a:rPr lang="en-US" dirty="0"/>
-              <a:t>Instructions for "Solution" slide:
-Platform overview
-Key capabilities
-Integration ecosystem
-Deployment options
-Replace this content with your own information.</a:t>
+              <a:t/>
             </a:r>
             <a:endParaRPr lang="en-US" dirty="0"/>
           </a:p>
@@ -1255,12 +1129,7 @@
           <a:p>
             <a:r>
               <a:rPr lang="en-US" dirty="0"/>
-              <a:t>Instructions for "Why Now" slide:
-Digital transformation trends
-Remote work drivers
-Technology enablers
-Regulatory changes
-Replace this content with your own information.</a:t>
+              <a:t/>
             </a:r>
             <a:endParaRPr lang="en-US" dirty="0"/>
           </a:p>
@@ -1348,12 +1217,7 @@
           <a:p>
             <a:r>
               <a:rPr lang="en-US" dirty="0"/>
-              <a:t>Instructions for "Product" slide:
-Core modules
-Workflow automation
-Reporting/analytics
-Admin controls
-Replace this content with your own information.</a:t>
+              <a:t/>
             </a:r>
             <a:endParaRPr lang="en-US" dirty="0"/>
           </a:p>
@@ -1441,12 +1305,7 @@
           <a:p>
             <a:r>
               <a:rPr lang="en-US" dirty="0"/>
-              <a:t>Instructions for "Customer Success" slide:
-Customer logos
-Use case examples
-ROI achieved
-Testimonials with metrics
-Replace this content with your own information.</a:t>
+              <a:t/>
             </a:r>
             <a:endParaRPr lang="en-US" dirty="0"/>
           </a:p>
@@ -1534,12 +1393,7 @@
           <a:p>
             <a:r>
               <a:rPr lang="en-US" dirty="0"/>
-              <a:t>Instructions for "Market Opportunity" slide:
-Total addressable market
-Serviceable market
-Current penetration
-Market growth rate
-Replace this content with your own information.</a:t>
+              <a:t/>
             </a:r>
             <a:endParaRPr lang="en-US" dirty="0"/>
           </a:p>
@@ -1627,14 +1481,7 @@
           <a:p>
             <a:r>
               <a:rPr lang="en-US" dirty="0"/>
-              <a:t>Instructions for "Business Model" slide:
-Pricing tiers
-ARR/MRR
-Net revenue retention
-CAC payback period
-LTV:CAC ratio
-Gross margin
-Replace this content with your own information.</a:t>
+              <a:t/>
             </a:r>
             <a:endParaRPr lang="en-US" dirty="0"/>
           </a:p>
@@ -1706,74 +1553,6 @@
 </p:sldLayout>
 </file>
 
-<file path=ppt/slideLayouts/slideLayout2.xml><?xml version="1.0" encoding="utf-8"?>
-<p:sldLayout xmlns:a="http://schemas.openxmlformats.org/drawingml/2006/main" xmlns:r="http://schemas.openxmlformats.org/officeDocument/2006/relationships" xmlns:p="http://schemas.openxmlformats.org/presentationml/2006/main" preserve="1">
-  <p:cSld name="MASTER_SLIDE">
-    <p:bg>
-      <p:bgPr>
-        <a:solidFill>
-          <a:srgbClr val="FFFFFF"/>
-        </a:solidFill>
-      </p:bgPr>
-    </p:bg>
-    <p:spTree>
-      <p:nvGrpSpPr>
-        <p:cNvPr id="1" name=""/>
-        <p:cNvGrpSpPr/>
-        <p:nvPr/>
-      </p:nvGrpSpPr>
-      <p:grpSpPr>
-        <a:xfrm>
-          <a:off x="0" y="0"/>
-          <a:ext cx="0" cy="0"/>
-          <a:chOff x="0" y="0"/>
-          <a:chExt cx="0" cy="0"/>
-        </a:xfrm>
-      </p:grpSpPr>
-      <p:sp>
-        <p:nvSpPr>
-          <p:cNvPr id="2" name="Text 0"/>
-          <p:cNvSpPr/>
-          <p:nvPr/>
-        </p:nvSpPr>
-        <p:spPr>
-          <a:xfrm>
-            <a:off x="457200" y="6217920"/>
-            <a:ext cx="8229600" cy="274320"/>
-          </a:xfrm>
-          <a:prstGeom prst="rect">
-            <a:avLst/>
-          </a:prstGeom>
-          <a:noFill/>
-          <a:ln/>
-        </p:spPr>
-        <p:txBody>
-          <a:bodyPr wrap="square" rtlCol="0" anchor="ctr"/>
-          <a:lstStyle/>
-          <a:p>
-            <a:pPr algn="r" indent="0" marL="0">
-              <a:buNone/>
-            </a:pPr>
-            <a:r>
-              <a:rPr lang="en-US" sz="1000" dirty="0">
-                <a:solidFill>
-                  <a:srgbClr val="666666"/>
-                </a:solidFill>
-              </a:rPr>
-              <a:t>Creatives Takeover</a:t>
-            </a:r>
-            <a:endParaRPr lang="en-US" sz="1000" dirty="0"/>
-          </a:p>
-        </p:txBody>
-      </p:sp>
-    </p:spTree>
-  </p:cSld>
-  <p:clrMapOvr>
-    <a:masterClrMapping/>
-  </p:clrMapOvr>
-</p:sldLayout>
-</file>
-
 <file path=ppt/slideMasters/slideMaster1.xml><?xml version="1.0" encoding="utf-8"?>
 <p:sldMaster xmlns:a="http://schemas.openxmlformats.org/drawingml/2006/main" xmlns:r="http://schemas.openxmlformats.org/officeDocument/2006/relationships" xmlns:p="http://schemas.openxmlformats.org/presentationml/2006/main">
   <p:cSld>
@@ -1796,7 +1575,6 @@
   <p:clrMap bg1="lt1" tx1="dk1" bg2="lt2" tx2="dk2" accent1="accent1" accent2="accent2" accent3="accent3" accent4="accent4" accent5="accent5" accent6="accent6" hlink="hlink" folHlink="folHlink"/>
   <p:sldLayoutIdLst>
     <p:sldLayoutId id="2147483649" r:id="rId1"/>
-    <p:sldLayoutId id="2147483650" r:id="rId2"/>
   </p:sldLayoutIdLst>
   <p:hf sldNum="0" hdr="0" ftr="0" dt="0"/>
   <p:txStyles>
@@ -2085,7 +1863,7 @@
         <p:spPr>
           <a:xfrm>
             <a:off x="457200" y="2286000"/>
-            <a:ext cx="8229600" cy="1371600"/>
+            <a:ext cx="8229600" cy="1097280"/>
           </a:xfrm>
           <a:prstGeom prst="rect">
             <a:avLst/>
@@ -2101,14 +1879,17 @@
               <a:buNone/>
             </a:pPr>
             <a:r>
-              <a:rPr lang="en-US" sz="4400" b="1" dirty="0">
+              <a:rPr lang="en-US" sz="4800" b="1" dirty="0">
                 <a:solidFill>
                   <a:srgbClr val="FFFFFF"/>
                 </a:solidFill>
-              </a:rPr>
-              <a:t>B2B SaaS Deck</a:t>
-            </a:r>
-            <a:endParaRPr lang="en-US" sz="4400" dirty="0"/>
+                <a:latin typeface="Calibri" pitchFamily="34" charset="0"/>
+                <a:ea typeface="Calibri" pitchFamily="34" charset="-122"/>
+                <a:cs typeface="Calibri" pitchFamily="34" charset="-120"/>
+              </a:rPr>
+              <a:t>Your SaaS Company</a:t>
+            </a:r>
+            <a:endParaRPr lang="en-US" sz="4800" dirty="0"/>
           </a:p>
         </p:txBody>
       </p:sp>
@@ -2120,8 +1901,8 @@
         </p:nvSpPr>
         <p:spPr>
           <a:xfrm>
-            <a:off x="457200" y="3657600"/>
-            <a:ext cx="8229600" cy="457200"/>
+            <a:off x="457200" y="3474720"/>
+            <a:ext cx="8229600" cy="548640"/>
           </a:xfrm>
           <a:prstGeom prst="rect">
             <a:avLst/>
@@ -2137,50 +1918,17 @@
               <a:buNone/>
             </a:pPr>
             <a:r>
-              <a:rPr lang="en-US" sz="2000" dirty="0">
+              <a:rPr lang="en-US" sz="2400" dirty="0">
                 <a:solidFill>
                   <a:srgbClr val="38BDF8"/>
                 </a:solidFill>
-              </a:rPr>
-              <a:t>Editable Template</a:t>
-            </a:r>
-            <a:endParaRPr lang="en-US" sz="2000" dirty="0"/>
-          </a:p>
-        </p:txBody>
-      </p:sp>
-      <p:sp>
-        <p:nvSpPr>
-          <p:cNvPr id="4" name="Text 2"/>
-          <p:cNvSpPr/>
-          <p:nvPr/>
-        </p:nvSpPr>
-        <p:spPr>
-          <a:xfrm>
-            <a:off x="457200" y="4297680"/>
-            <a:ext cx="8229600" cy="274320"/>
-          </a:xfrm>
-          <a:prstGeom prst="rect">
-            <a:avLst/>
-          </a:prstGeom>
-          <a:noFill/>
-          <a:ln/>
-        </p:spPr>
-        <p:txBody>
-          <a:bodyPr wrap="square" rtlCol="0" anchor="ctr"/>
-          <a:lstStyle/>
-          <a:p>
-            <a:pPr algn="ctr" indent="0" marL="0">
-              <a:buNone/>
-            </a:pPr>
-            <a:r>
-              <a:rPr lang="en-US" sz="1400" dirty="0">
-                <a:solidFill>
-                  <a:srgbClr val="CCCCCC"/>
-                </a:solidFill>
-              </a:rPr>
-              <a:t>Created by Creatives Takeover</a:t>
-            </a:r>
-            <a:endParaRPr lang="en-US" sz="1400" dirty="0"/>
+                <a:latin typeface="Calibri" pitchFamily="34" charset="0"/>
+                <a:ea typeface="Calibri" pitchFamily="34" charset="-122"/>
+                <a:cs typeface="Calibri" pitchFamily="34" charset="-120"/>
+              </a:rPr>
+              <a:t>Enterprise-grade solution for [industry]</a:t>
+            </a:r>
+            <a:endParaRPr lang="en-US" sz="2400" dirty="0"/>
           </a:p>
         </p:txBody>
       </p:sp>
@@ -2195,6 +1943,13 @@
 <file path=ppt/slides/slide10.xml><?xml version="1.0" encoding="utf-8"?>
 <p:sld xmlns:a="http://schemas.openxmlformats.org/drawingml/2006/main" xmlns:r="http://schemas.openxmlformats.org/officeDocument/2006/relationships" xmlns:p="http://schemas.openxmlformats.org/presentationml/2006/main">
   <p:cSld name="Slide 10">
+    <p:bg>
+      <p:bgPr>
+        <a:solidFill>
+          <a:srgbClr val="FFFFFF"/>
+        </a:solidFill>
+      </p:bgPr>
+    </p:bg>
     <p:spTree>
       <p:nvGrpSpPr>
         <p:cNvPr id="1" name=""/>
@@ -2211,14 +1966,34 @@
       </p:grpSpPr>
       <p:sp>
         <p:nvSpPr>
-          <p:cNvPr id="2" name="Text 0"/>
-          <p:cNvSpPr/>
-          <p:nvPr/>
-        </p:nvSpPr>
-        <p:spPr>
-          <a:xfrm>
-            <a:off x="457200" y="457200"/>
-            <a:ext cx="8229600" cy="685800"/>
+          <p:cNvPr id="2" name="Shape 0"/>
+          <p:cNvSpPr/>
+          <p:nvPr/>
+        </p:nvSpPr>
+        <p:spPr>
+          <a:xfrm>
+            <a:off x="0" y="0"/>
+            <a:ext cx="9144000" cy="137160"/>
+          </a:xfrm>
+          <a:prstGeom prst="rect">
+            <a:avLst/>
+          </a:prstGeom>
+          <a:solidFill>
+            <a:srgbClr val="0B1437"/>
+          </a:solidFill>
+          <a:ln/>
+        </p:spPr>
+      </p:sp>
+      <p:sp>
+        <p:nvSpPr>
+          <p:cNvPr id="3" name="Text 1"/>
+          <p:cNvSpPr/>
+          <p:nvPr/>
+        </p:nvSpPr>
+        <p:spPr>
+          <a:xfrm>
+            <a:off x="457200" y="365760"/>
+            <a:ext cx="8229600" cy="548640"/>
           </a:xfrm>
           <a:prstGeom prst="rect">
             <a:avLst/>
@@ -2238,8 +2013,11 @@
                 <a:solidFill>
                   <a:srgbClr val="0B1437"/>
                 </a:solidFill>
-              </a:rPr>
-              <a:t>Go-to-Market</a:t>
+                <a:latin typeface="Calibri" pitchFamily="34" charset="0"/>
+                <a:ea typeface="Calibri" pitchFamily="34" charset="-122"/>
+                <a:cs typeface="Calibri" pitchFamily="34" charset="-120"/>
+              </a:rPr>
+              <a:t>Product Roadmap</a:t>
             </a:r>
             <a:endParaRPr lang="en-US" sz="3200" dirty="0"/>
           </a:p>
@@ -2247,7 +2025,46 @@
       </p:sp>
       <p:sp>
         <p:nvSpPr>
-          <p:cNvPr id="3" name="Text 1"/>
+          <p:cNvPr id="4" name="Text 2"/>
+          <p:cNvSpPr/>
+          <p:nvPr/>
+        </p:nvSpPr>
+        <p:spPr>
+          <a:xfrm>
+            <a:off x="457200" y="914400"/>
+            <a:ext cx="8229600" cy="365760"/>
+          </a:xfrm>
+          <a:prstGeom prst="rect">
+            <a:avLst/>
+          </a:prstGeom>
+          <a:noFill/>
+          <a:ln/>
+        </p:spPr>
+        <p:txBody>
+          <a:bodyPr wrap="square" rtlCol="0" anchor="ctr"/>
+          <a:lstStyle/>
+          <a:p>
+            <a:pPr indent="0" marL="0">
+              <a:buNone/>
+            </a:pPr>
+            <a:r>
+              <a:rPr lang="en-US" sz="1600" i="1" dirty="0">
+                <a:solidFill>
+                  <a:srgbClr val="6B7280"/>
+                </a:solidFill>
+                <a:latin typeface="Calibri" pitchFamily="34" charset="0"/>
+                <a:ea typeface="Calibri" pitchFamily="34" charset="-122"/>
+                <a:cs typeface="Calibri" pitchFamily="34" charset="-120"/>
+              </a:rPr>
+              <a:t>Continuous innovation</a:t>
+            </a:r>
+            <a:endParaRPr lang="en-US" sz="1600" dirty="0"/>
+          </a:p>
+        </p:txBody>
+      </p:sp>
+      <p:sp>
+        <p:nvSpPr>
+          <p:cNvPr id="5" name="Text 3"/>
           <p:cNvSpPr/>
           <p:nvPr/>
         </p:nvSpPr>
@@ -2274,14 +2091,38 @@
               <a:buChar char="•"/>
             </a:pPr>
             <a:r>
-              <a:rPr lang="en-US" sz="1600" dirty="0">
-                <a:solidFill>
-                  <a:srgbClr val="374151"/>
-                </a:solidFill>
-              </a:rPr>
-              <a:t>Sales channels</a:t>
-            </a:r>
-            <a:endParaRPr lang="en-US" sz="1600" dirty="0"/>
+              <a:rPr lang="en-US" sz="1800" b="1" dirty="0">
+                <a:solidFill>
+                  <a:srgbClr val="1F2937"/>
+                </a:solidFill>
+                <a:latin typeface="Calibri" pitchFamily="34" charset="0"/>
+                <a:ea typeface="Calibri" pitchFamily="34" charset="-122"/>
+                <a:cs typeface="Calibri" pitchFamily="34" charset="-120"/>
+              </a:rPr>
+              <a:t>Recently shipped:</a:t>
+            </a:r>
+            <a:endParaRPr lang="en-US" sz="1800" dirty="0"/>
+          </a:p>
+          <a:p>
+            <a:pPr lvl="1" marL="685800" indent="-342900">
+              <a:lnSpc>
+                <a:spcPts val="2800"/>
+              </a:lnSpc>
+              <a:buSzPct val="100000"/>
+              <a:buChar char="•"/>
+            </a:pPr>
+            <a:r>
+              <a:rPr lang="en-US" sz="1800" dirty="0">
+                <a:solidFill>
+                  <a:srgbClr val="6B7280"/>
+                </a:solidFill>
+                <a:latin typeface="Calibri" pitchFamily="34" charset="0"/>
+                <a:ea typeface="Calibri" pitchFamily="34" charset="-122"/>
+                <a:cs typeface="Calibri" pitchFamily="34" charset="-120"/>
+              </a:rPr>
+              <a:t>Advanced AI models, 50+ new integrations, mobile app</a:t>
+            </a:r>
+            <a:endParaRPr lang="en-US" sz="1800" dirty="0"/>
           </a:p>
           <a:p>
             <a:pPr marL="342900" indent="-342900">
@@ -2292,14 +2133,38 @@
               <a:buChar char="•"/>
             </a:pPr>
             <a:r>
-              <a:rPr lang="en-US" sz="1600" dirty="0">
-                <a:solidFill>
-                  <a:srgbClr val="374151"/>
-                </a:solidFill>
-              </a:rPr>
-              <a:t>Customer acquisition strategy</a:t>
-            </a:r>
-            <a:endParaRPr lang="en-US" sz="1600" dirty="0"/>
+              <a:rPr lang="en-US" sz="1800" b="1" dirty="0">
+                <a:solidFill>
+                  <a:srgbClr val="1F2937"/>
+                </a:solidFill>
+                <a:latin typeface="Calibri" pitchFamily="34" charset="0"/>
+                <a:ea typeface="Calibri" pitchFamily="34" charset="-122"/>
+                <a:cs typeface="Calibri" pitchFamily="34" charset="-120"/>
+              </a:rPr>
+              <a:t>Next 6 months:</a:t>
+            </a:r>
+            <a:endParaRPr lang="en-US" sz="1800" dirty="0"/>
+          </a:p>
+          <a:p>
+            <a:pPr lvl="1" marL="685800" indent="-342900">
+              <a:lnSpc>
+                <a:spcPts val="2800"/>
+              </a:lnSpc>
+              <a:buSzPct val="100000"/>
+              <a:buChar char="•"/>
+            </a:pPr>
+            <a:r>
+              <a:rPr lang="en-US" sz="1800" dirty="0">
+                <a:solidFill>
+                  <a:srgbClr val="6B7280"/>
+                </a:solidFill>
+                <a:latin typeface="Calibri" pitchFamily="34" charset="0"/>
+                <a:ea typeface="Calibri" pitchFamily="34" charset="-122"/>
+                <a:cs typeface="Calibri" pitchFamily="34" charset="-120"/>
+              </a:rPr>
+              <a:t>Multi-region deployment, enhanced security features, workflow automation</a:t>
+            </a:r>
+            <a:endParaRPr lang="en-US" sz="1800" dirty="0"/>
           </a:p>
           <a:p>
             <a:pPr marL="342900" indent="-342900">
@@ -2310,32 +2175,136 @@
               <a:buChar char="•"/>
             </a:pPr>
             <a:r>
-              <a:rPr lang="en-US" sz="1600" dirty="0">
-                <a:solidFill>
-                  <a:srgbClr val="374151"/>
-                </a:solidFill>
-              </a:rPr>
-              <a:t>Sales cycle length</a:t>
-            </a:r>
-            <a:endParaRPr lang="en-US" sz="1600" dirty="0"/>
-          </a:p>
-          <a:p>
-            <a:pPr marL="342900" indent="-342900">
-              <a:lnSpc>
-                <a:spcPts val="2800"/>
-              </a:lnSpc>
-              <a:buSzPct val="100000"/>
-              <a:buChar char="•"/>
-            </a:pPr>
-            <a:r>
-              <a:rPr lang="en-US" sz="1600" dirty="0">
-                <a:solidFill>
-                  <a:srgbClr val="374151"/>
-                </a:solidFill>
-              </a:rPr>
-              <a:t>Expansion strategy</a:t>
-            </a:r>
-            <a:endParaRPr lang="en-US" sz="1600" dirty="0"/>
+              <a:rPr lang="en-US" sz="1800" b="1" dirty="0">
+                <a:solidFill>
+                  <a:srgbClr val="1F2937"/>
+                </a:solidFill>
+                <a:latin typeface="Calibri" pitchFamily="34" charset="0"/>
+                <a:ea typeface="Calibri" pitchFamily="34" charset="-122"/>
+                <a:cs typeface="Calibri" pitchFamily="34" charset="-120"/>
+              </a:rPr>
+              <a:t>Next 12 months:</a:t>
+            </a:r>
+            <a:endParaRPr lang="en-US" sz="1800" dirty="0"/>
+          </a:p>
+          <a:p>
+            <a:pPr lvl="1" marL="685800" indent="-342900">
+              <a:lnSpc>
+                <a:spcPts val="2800"/>
+              </a:lnSpc>
+              <a:buSzPct val="100000"/>
+              <a:buChar char="•"/>
+            </a:pPr>
+            <a:r>
+              <a:rPr lang="en-US" sz="1800" dirty="0">
+                <a:solidFill>
+                  <a:srgbClr val="6B7280"/>
+                </a:solidFill>
+                <a:latin typeface="Calibri" pitchFamily="34" charset="0"/>
+                <a:ea typeface="Calibri" pitchFamily="34" charset="-122"/>
+                <a:cs typeface="Calibri" pitchFamily="34" charset="-120"/>
+              </a:rPr>
+              <a:t>Predictive analytics, self-service admin portal, partner ecosystem</a:t>
+            </a:r>
+            <a:endParaRPr lang="en-US" sz="1800" dirty="0"/>
+          </a:p>
+        </p:txBody>
+      </p:sp>
+      <p:sp>
+        <p:nvSpPr>
+          <p:cNvPr id="6" name="Shape 4"/>
+          <p:cNvSpPr/>
+          <p:nvPr/>
+        </p:nvSpPr>
+        <p:spPr>
+          <a:xfrm>
+            <a:off x="0" y="6720840"/>
+            <a:ext cx="73152" cy="137160"/>
+          </a:xfrm>
+          <a:prstGeom prst="rect">
+            <a:avLst/>
+          </a:prstGeom>
+          <a:solidFill>
+            <a:srgbClr val="38BDF8"/>
+          </a:solidFill>
+          <a:ln/>
+        </p:spPr>
+      </p:sp>
+      <p:sp>
+        <p:nvSpPr>
+          <p:cNvPr id="7" name="Text 5"/>
+          <p:cNvSpPr/>
+          <p:nvPr/>
+        </p:nvSpPr>
+        <p:spPr>
+          <a:xfrm>
+            <a:off x="274320" y="6720840"/>
+            <a:ext cx="2743200" cy="137160"/>
+          </a:xfrm>
+          <a:prstGeom prst="rect">
+            <a:avLst/>
+          </a:prstGeom>
+          <a:noFill/>
+          <a:ln/>
+        </p:spPr>
+        <p:txBody>
+          <a:bodyPr wrap="square" rtlCol="0" anchor="ctr"/>
+          <a:lstStyle/>
+          <a:p>
+            <a:pPr indent="0" marL="0">
+              <a:buNone/>
+            </a:pPr>
+            <a:r>
+              <a:rPr lang="en-US" sz="1000" dirty="0">
+                <a:solidFill>
+                  <a:srgbClr val="6B7280"/>
+                </a:solidFill>
+                <a:latin typeface="Calibri" pitchFamily="34" charset="0"/>
+                <a:ea typeface="Calibri" pitchFamily="34" charset="-122"/>
+                <a:cs typeface="Calibri" pitchFamily="34" charset="-120"/>
+              </a:rPr>
+              <a:t>Creatives Takeover</a:t>
+            </a:r>
+            <a:endParaRPr lang="en-US" sz="1000" dirty="0"/>
+          </a:p>
+        </p:txBody>
+      </p:sp>
+      <p:sp>
+        <p:nvSpPr>
+          <p:cNvPr id="8" name="Text 6"/>
+          <p:cNvSpPr/>
+          <p:nvPr/>
+        </p:nvSpPr>
+        <p:spPr>
+          <a:xfrm>
+            <a:off x="8412480" y="6720840"/>
+            <a:ext cx="274320" cy="137160"/>
+          </a:xfrm>
+          <a:prstGeom prst="rect">
+            <a:avLst/>
+          </a:prstGeom>
+          <a:noFill/>
+          <a:ln/>
+        </p:spPr>
+        <p:txBody>
+          <a:bodyPr wrap="square" rtlCol="0" anchor="ctr"/>
+          <a:lstStyle/>
+          <a:p>
+            <a:pPr algn="r" indent="0" marL="0">
+              <a:buNone/>
+            </a:pPr>
+            <a:r>
+              <a:rPr lang="en-US" sz="1000" dirty="0">
+                <a:solidFill>
+                  <a:srgbClr val="6B7280"/>
+                </a:solidFill>
+                <a:latin typeface="Calibri" pitchFamily="34" charset="0"/>
+                <a:ea typeface="Calibri" pitchFamily="34" charset="-122"/>
+                <a:cs typeface="Calibri" pitchFamily="34" charset="-120"/>
+              </a:rPr>
+              <a:t>10</a:t>
+            </a:r>
+            <a:endParaRPr lang="en-US" sz="1000" dirty="0"/>
           </a:p>
         </p:txBody>
       </p:sp>
@@ -2350,6 +2319,13 @@
 <file path=ppt/slides/slide11.xml><?xml version="1.0" encoding="utf-8"?>
 <p:sld xmlns:a="http://schemas.openxmlformats.org/drawingml/2006/main" xmlns:r="http://schemas.openxmlformats.org/officeDocument/2006/relationships" xmlns:p="http://schemas.openxmlformats.org/presentationml/2006/main">
   <p:cSld name="Slide 11">
+    <p:bg>
+      <p:bgPr>
+        <a:solidFill>
+          <a:srgbClr val="FFFFFF"/>
+        </a:solidFill>
+      </p:bgPr>
+    </p:bg>
     <p:spTree>
       <p:nvGrpSpPr>
         <p:cNvPr id="1" name=""/>
@@ -2366,14 +2342,34 @@
       </p:grpSpPr>
       <p:sp>
         <p:nvSpPr>
-          <p:cNvPr id="2" name="Text 0"/>
-          <p:cNvSpPr/>
-          <p:nvPr/>
-        </p:nvSpPr>
-        <p:spPr>
-          <a:xfrm>
-            <a:off x="457200" y="457200"/>
-            <a:ext cx="8229600" cy="685800"/>
+          <p:cNvPr id="2" name="Shape 0"/>
+          <p:cNvSpPr/>
+          <p:nvPr/>
+        </p:nvSpPr>
+        <p:spPr>
+          <a:xfrm>
+            <a:off x="0" y="0"/>
+            <a:ext cx="9144000" cy="137160"/>
+          </a:xfrm>
+          <a:prstGeom prst="rect">
+            <a:avLst/>
+          </a:prstGeom>
+          <a:solidFill>
+            <a:srgbClr val="0B1437"/>
+          </a:solidFill>
+          <a:ln/>
+        </p:spPr>
+      </p:sp>
+      <p:sp>
+        <p:nvSpPr>
+          <p:cNvPr id="3" name="Text 1"/>
+          <p:cNvSpPr/>
+          <p:nvPr/>
+        </p:nvSpPr>
+        <p:spPr>
+          <a:xfrm>
+            <a:off x="457200" y="365760"/>
+            <a:ext cx="8229600" cy="548640"/>
           </a:xfrm>
           <a:prstGeom prst="rect">
             <a:avLst/>
@@ -2393,8 +2389,11 @@
                 <a:solidFill>
                   <a:srgbClr val="0B1437"/>
                 </a:solidFill>
-              </a:rPr>
-              <a:t>Competition</a:t>
+                <a:latin typeface="Calibri" pitchFamily="34" charset="0"/>
+                <a:ea typeface="Calibri" pitchFamily="34" charset="-122"/>
+                <a:cs typeface="Calibri" pitchFamily="34" charset="-120"/>
+              </a:rPr>
+              <a:t>The Team</a:t>
             </a:r>
             <a:endParaRPr lang="en-US" sz="3200" dirty="0"/>
           </a:p>
@@ -2402,7 +2401,46 @@
       </p:sp>
       <p:sp>
         <p:nvSpPr>
-          <p:cNvPr id="3" name="Text 1"/>
+          <p:cNvPr id="4" name="Text 2"/>
+          <p:cNvSpPr/>
+          <p:nvPr/>
+        </p:nvSpPr>
+        <p:spPr>
+          <a:xfrm>
+            <a:off x="457200" y="914400"/>
+            <a:ext cx="8229600" cy="365760"/>
+          </a:xfrm>
+          <a:prstGeom prst="rect">
+            <a:avLst/>
+          </a:prstGeom>
+          <a:noFill/>
+          <a:ln/>
+        </p:spPr>
+        <p:txBody>
+          <a:bodyPr wrap="square" rtlCol="0" anchor="ctr"/>
+          <a:lstStyle/>
+          <a:p>
+            <a:pPr indent="0" marL="0">
+              <a:buNone/>
+            </a:pPr>
+            <a:r>
+              <a:rPr lang="en-US" sz="1600" i="1" dirty="0">
+                <a:solidFill>
+                  <a:srgbClr val="6B7280"/>
+                </a:solidFill>
+                <a:latin typeface="Calibri" pitchFamily="34" charset="0"/>
+                <a:ea typeface="Calibri" pitchFamily="34" charset="-122"/>
+                <a:cs typeface="Calibri" pitchFamily="34" charset="-120"/>
+              </a:rPr>
+              <a:t>Enterprise SaaS veterans</a:t>
+            </a:r>
+            <a:endParaRPr lang="en-US" sz="1600" dirty="0"/>
+          </a:p>
+        </p:txBody>
+      </p:sp>
+      <p:sp>
+        <p:nvSpPr>
+          <p:cNvPr id="5" name="Text 3"/>
           <p:cNvSpPr/>
           <p:nvPr/>
         </p:nvSpPr>
@@ -2429,14 +2467,17 @@
               <a:buChar char="•"/>
             </a:pPr>
             <a:r>
-              <a:rPr lang="en-US" sz="1600" dirty="0">
-                <a:solidFill>
-                  <a:srgbClr val="374151"/>
-                </a:solidFill>
-              </a:rPr>
-              <a:t>Competitive landscape</a:t>
-            </a:r>
-            <a:endParaRPr lang="en-US" sz="1600" dirty="0"/>
+              <a:rPr lang="en-US" sz="1800" b="1" dirty="0">
+                <a:solidFill>
+                  <a:srgbClr val="1F2937"/>
+                </a:solidFill>
+                <a:latin typeface="Calibri" pitchFamily="34" charset="0"/>
+                <a:ea typeface="Calibri" pitchFamily="34" charset="-122"/>
+                <a:cs typeface="Calibri" pitchFamily="34" charset="-120"/>
+              </a:rPr>
+              <a:t>CEO: Jane Doe - Former VP Product at Salesforce, scaled team from 50 to 500</a:t>
+            </a:r>
+            <a:endParaRPr lang="en-US" sz="1800" dirty="0"/>
           </a:p>
           <a:p>
             <a:pPr marL="342900" indent="-342900">
@@ -2447,14 +2488,17 @@
               <a:buChar char="•"/>
             </a:pPr>
             <a:r>
-              <a:rPr lang="en-US" sz="1600" dirty="0">
-                <a:solidFill>
-                  <a:srgbClr val="374151"/>
-                </a:solidFill>
-              </a:rPr>
-              <a:t>Positioning matrix</a:t>
-            </a:r>
-            <a:endParaRPr lang="en-US" sz="1600" dirty="0"/>
+              <a:rPr lang="en-US" sz="1800" b="1" dirty="0">
+                <a:solidFill>
+                  <a:srgbClr val="1F2937"/>
+                </a:solidFill>
+                <a:latin typeface="Calibri" pitchFamily="34" charset="0"/>
+                <a:ea typeface="Calibri" pitchFamily="34" charset="-122"/>
+                <a:cs typeface="Calibri" pitchFamily="34" charset="-120"/>
+              </a:rPr>
+              <a:t>CTO: John Smith - Ex-CTO at Workday, built platform serving 10M+ users</a:t>
+            </a:r>
+            <a:endParaRPr lang="en-US" sz="1800" dirty="0"/>
           </a:p>
           <a:p>
             <a:pPr marL="342900" indent="-342900">
@@ -2465,14 +2509,17 @@
               <a:buChar char="•"/>
             </a:pPr>
             <a:r>
-              <a:rPr lang="en-US" sz="1600" dirty="0">
-                <a:solidFill>
-                  <a:srgbClr val="374151"/>
-                </a:solidFill>
-              </a:rPr>
-              <a:t>Differentiation</a:t>
-            </a:r>
-            <a:endParaRPr lang="en-US" sz="1600" dirty="0"/>
+              <a:rPr lang="en-US" sz="1800" b="1" dirty="0">
+                <a:solidFill>
+                  <a:srgbClr val="1F2937"/>
+                </a:solidFill>
+                <a:latin typeface="Calibri" pitchFamily="34" charset="0"/>
+                <a:ea typeface="Calibri" pitchFamily="34" charset="-122"/>
+                <a:cs typeface="Calibri" pitchFamily="34" charset="-120"/>
+              </a:rPr>
+              <a:t>VP Sales: Sarah Johnson - Former Enterprise Sales Director at HubSpot, $50M quota carrier</a:t>
+            </a:r>
+            <a:endParaRPr lang="en-US" sz="1800" dirty="0"/>
           </a:p>
           <a:p>
             <a:pPr marL="342900" indent="-342900">
@@ -2483,14 +2530,136 @@
               <a:buChar char="•"/>
             </a:pPr>
             <a:r>
-              <a:rPr lang="en-US" sz="1600" dirty="0">
-                <a:solidFill>
-                  <a:srgbClr val="374151"/>
-                </a:solidFill>
-              </a:rPr>
-              <a:t>Switching costs</a:t>
-            </a:r>
-            <a:endParaRPr lang="en-US" sz="1600" dirty="0"/>
+              <a:rPr lang="en-US" sz="1800" b="1" dirty="0">
+                <a:solidFill>
+                  <a:srgbClr val="1F2937"/>
+                </a:solidFill>
+                <a:latin typeface="Calibri" pitchFamily="34" charset="0"/>
+                <a:ea typeface="Calibri" pitchFamily="34" charset="-122"/>
+                <a:cs typeface="Calibri" pitchFamily="34" charset="-120"/>
+              </a:rPr>
+              <a:t>VP Engineering: Mike Chen - Former Staff Engineer at Google, distributed systems expert</a:t>
+            </a:r>
+            <a:endParaRPr lang="en-US" sz="1800" dirty="0"/>
+          </a:p>
+          <a:p>
+            <a:pPr marL="342900" indent="-342900">
+              <a:lnSpc>
+                <a:spcPts val="2800"/>
+              </a:lnSpc>
+              <a:buSzPct val="100000"/>
+              <a:buChar char="•"/>
+            </a:pPr>
+            <a:r>
+              <a:rPr lang="en-US" sz="1800" b="1" dirty="0">
+                <a:solidFill>
+                  <a:srgbClr val="1F2937"/>
+                </a:solidFill>
+                <a:latin typeface="Calibri" pitchFamily="34" charset="0"/>
+                <a:ea typeface="Calibri" pitchFamily="34" charset="-122"/>
+                <a:cs typeface="Calibri" pitchFamily="34" charset="-120"/>
+              </a:rPr>
+              <a:t>Team: 45 employees (20 engineering, 15 sales, 10 customer success)</a:t>
+            </a:r>
+            <a:endParaRPr lang="en-US" sz="1800" dirty="0"/>
+          </a:p>
+        </p:txBody>
+      </p:sp>
+      <p:sp>
+        <p:nvSpPr>
+          <p:cNvPr id="6" name="Shape 4"/>
+          <p:cNvSpPr/>
+          <p:nvPr/>
+        </p:nvSpPr>
+        <p:spPr>
+          <a:xfrm>
+            <a:off x="0" y="6720840"/>
+            <a:ext cx="73152" cy="137160"/>
+          </a:xfrm>
+          <a:prstGeom prst="rect">
+            <a:avLst/>
+          </a:prstGeom>
+          <a:solidFill>
+            <a:srgbClr val="38BDF8"/>
+          </a:solidFill>
+          <a:ln/>
+        </p:spPr>
+      </p:sp>
+      <p:sp>
+        <p:nvSpPr>
+          <p:cNvPr id="7" name="Text 5"/>
+          <p:cNvSpPr/>
+          <p:nvPr/>
+        </p:nvSpPr>
+        <p:spPr>
+          <a:xfrm>
+            <a:off x="274320" y="6720840"/>
+            <a:ext cx="2743200" cy="137160"/>
+          </a:xfrm>
+          <a:prstGeom prst="rect">
+            <a:avLst/>
+          </a:prstGeom>
+          <a:noFill/>
+          <a:ln/>
+        </p:spPr>
+        <p:txBody>
+          <a:bodyPr wrap="square" rtlCol="0" anchor="ctr"/>
+          <a:lstStyle/>
+          <a:p>
+            <a:pPr indent="0" marL="0">
+              <a:buNone/>
+            </a:pPr>
+            <a:r>
+              <a:rPr lang="en-US" sz="1000" dirty="0">
+                <a:solidFill>
+                  <a:srgbClr val="6B7280"/>
+                </a:solidFill>
+                <a:latin typeface="Calibri" pitchFamily="34" charset="0"/>
+                <a:ea typeface="Calibri" pitchFamily="34" charset="-122"/>
+                <a:cs typeface="Calibri" pitchFamily="34" charset="-120"/>
+              </a:rPr>
+              <a:t>Creatives Takeover</a:t>
+            </a:r>
+            <a:endParaRPr lang="en-US" sz="1000" dirty="0"/>
+          </a:p>
+        </p:txBody>
+      </p:sp>
+      <p:sp>
+        <p:nvSpPr>
+          <p:cNvPr id="8" name="Text 6"/>
+          <p:cNvSpPr/>
+          <p:nvPr/>
+        </p:nvSpPr>
+        <p:spPr>
+          <a:xfrm>
+            <a:off x="8412480" y="6720840"/>
+            <a:ext cx="274320" cy="137160"/>
+          </a:xfrm>
+          <a:prstGeom prst="rect">
+            <a:avLst/>
+          </a:prstGeom>
+          <a:noFill/>
+          <a:ln/>
+        </p:spPr>
+        <p:txBody>
+          <a:bodyPr wrap="square" rtlCol="0" anchor="ctr"/>
+          <a:lstStyle/>
+          <a:p>
+            <a:pPr algn="r" indent="0" marL="0">
+              <a:buNone/>
+            </a:pPr>
+            <a:r>
+              <a:rPr lang="en-US" sz="1000" dirty="0">
+                <a:solidFill>
+                  <a:srgbClr val="6B7280"/>
+                </a:solidFill>
+                <a:latin typeface="Calibri" pitchFamily="34" charset="0"/>
+                <a:ea typeface="Calibri" pitchFamily="34" charset="-122"/>
+                <a:cs typeface="Calibri" pitchFamily="34" charset="-120"/>
+              </a:rPr>
+              <a:t>11</a:t>
+            </a:r>
+            <a:endParaRPr lang="en-US" sz="1000" dirty="0"/>
           </a:p>
         </p:txBody>
       </p:sp>
@@ -2505,6 +2674,13 @@
 <file path=ppt/slides/slide12.xml><?xml version="1.0" encoding="utf-8"?>
 <p:sld xmlns:a="http://schemas.openxmlformats.org/drawingml/2006/main" xmlns:r="http://schemas.openxmlformats.org/officeDocument/2006/relationships" xmlns:p="http://schemas.openxmlformats.org/presentationml/2006/main">
   <p:cSld name="Slide 12">
+    <p:bg>
+      <p:bgPr>
+        <a:solidFill>
+          <a:srgbClr val="FFFFFF"/>
+        </a:solidFill>
+      </p:bgPr>
+    </p:bg>
     <p:spTree>
       <p:nvGrpSpPr>
         <p:cNvPr id="1" name=""/>
@@ -2521,14 +2697,34 @@
       </p:grpSpPr>
       <p:sp>
         <p:nvSpPr>
-          <p:cNvPr id="2" name="Text 0"/>
-          <p:cNvSpPr/>
-          <p:nvPr/>
-        </p:nvSpPr>
-        <p:spPr>
-          <a:xfrm>
-            <a:off x="457200" y="457200"/>
-            <a:ext cx="8229600" cy="685800"/>
+          <p:cNvPr id="2" name="Shape 0"/>
+          <p:cNvSpPr/>
+          <p:nvPr/>
+        </p:nvSpPr>
+        <p:spPr>
+          <a:xfrm>
+            <a:off x="0" y="0"/>
+            <a:ext cx="9144000" cy="137160"/>
+          </a:xfrm>
+          <a:prstGeom prst="rect">
+            <a:avLst/>
+          </a:prstGeom>
+          <a:solidFill>
+            <a:srgbClr val="0B1437"/>
+          </a:solidFill>
+          <a:ln/>
+        </p:spPr>
+      </p:sp>
+      <p:sp>
+        <p:nvSpPr>
+          <p:cNvPr id="3" name="Text 1"/>
+          <p:cNvSpPr/>
+          <p:nvPr/>
+        </p:nvSpPr>
+        <p:spPr>
+          <a:xfrm>
+            <a:off x="457200" y="365760"/>
+            <a:ext cx="8229600" cy="548640"/>
           </a:xfrm>
           <a:prstGeom prst="rect">
             <a:avLst/>
@@ -2548,8 +2744,11 @@
                 <a:solidFill>
                   <a:srgbClr val="0B1437"/>
                 </a:solidFill>
-              </a:rPr>
-              <a:t>Team</a:t>
+                <a:latin typeface="Calibri" pitchFamily="34" charset="0"/>
+                <a:ea typeface="Calibri" pitchFamily="34" charset="-122"/>
+                <a:cs typeface="Calibri" pitchFamily="34" charset="-120"/>
+              </a:rPr>
+              <a:t>The Ask</a:t>
             </a:r>
             <a:endParaRPr lang="en-US" sz="3200" dirty="0"/>
           </a:p>
@@ -2557,7 +2756,46 @@
       </p:sp>
       <p:sp>
         <p:nvSpPr>
-          <p:cNvPr id="3" name="Text 1"/>
+          <p:cNvPr id="4" name="Text 2"/>
+          <p:cNvSpPr/>
+          <p:nvPr/>
+        </p:nvSpPr>
+        <p:spPr>
+          <a:xfrm>
+            <a:off x="457200" y="914400"/>
+            <a:ext cx="8229600" cy="365760"/>
+          </a:xfrm>
+          <a:prstGeom prst="rect">
+            <a:avLst/>
+          </a:prstGeom>
+          <a:noFill/>
+          <a:ln/>
+        </p:spPr>
+        <p:txBody>
+          <a:bodyPr wrap="square" rtlCol="0" anchor="ctr"/>
+          <a:lstStyle/>
+          <a:p>
+            <a:pPr indent="0" marL="0">
+              <a:buNone/>
+            </a:pPr>
+            <a:r>
+              <a:rPr lang="en-US" sz="1600" i="1" dirty="0">
+                <a:solidFill>
+                  <a:srgbClr val="6B7280"/>
+                </a:solidFill>
+                <a:latin typeface="Calibri" pitchFamily="34" charset="0"/>
+                <a:ea typeface="Calibri" pitchFamily="34" charset="-122"/>
+                <a:cs typeface="Calibri" pitchFamily="34" charset="-120"/>
+              </a:rPr>
+              <a:t>Series A to scale enterprise sales</a:t>
+            </a:r>
+            <a:endParaRPr lang="en-US" sz="1600" dirty="0"/>
+          </a:p>
+        </p:txBody>
+      </p:sp>
+      <p:sp>
+        <p:nvSpPr>
+          <p:cNvPr id="5" name="Text 3"/>
           <p:cNvSpPr/>
           <p:nvPr/>
         </p:nvSpPr>
@@ -2584,14 +2822,17 @@
               <a:buChar char="•"/>
             </a:pPr>
             <a:r>
-              <a:rPr lang="en-US" sz="1600" dirty="0">
-                <a:solidFill>
-                  <a:srgbClr val="374151"/>
-                </a:solidFill>
-              </a:rPr>
-              <a:t>Founders with B2B background</a:t>
-            </a:r>
-            <a:endParaRPr lang="en-US" sz="1600" dirty="0"/>
+              <a:rPr lang="en-US" sz="2400" b="1" dirty="0">
+                <a:solidFill>
+                  <a:srgbClr val="0B1437"/>
+                </a:solidFill>
+                <a:latin typeface="Calibri" pitchFamily="34" charset="0"/>
+                <a:ea typeface="Calibri" pitchFamily="34" charset="-122"/>
+                <a:cs typeface="Calibri" pitchFamily="34" charset="-120"/>
+              </a:rPr>
+              <a:t>Raising $10M Series A at $40M pre-money valuation</a:t>
+            </a:r>
+            <a:endParaRPr lang="en-US" sz="2400" dirty="0"/>
           </a:p>
           <a:p>
             <a:pPr marL="342900" indent="-342900">
@@ -2602,14 +2843,80 @@
               <a:buChar char="•"/>
             </a:pPr>
             <a:r>
-              <a:rPr lang="en-US" sz="1600" dirty="0">
-                <a:solidFill>
-                  <a:srgbClr val="374151"/>
-                </a:solidFill>
-              </a:rPr>
-              <a:t>Previous enterprise sales</a:t>
-            </a:r>
-            <a:endParaRPr lang="en-US" sz="1600" dirty="0"/>
+              <a:rPr lang="en-US" sz="1800" b="1" dirty="0">
+                <a:solidFill>
+                  <a:srgbClr val="1F2937"/>
+                </a:solidFill>
+                <a:latin typeface="Calibri" pitchFamily="34" charset="0"/>
+                <a:ea typeface="Calibri" pitchFamily="34" charset="-122"/>
+                <a:cs typeface="Calibri" pitchFamily="34" charset="-120"/>
+              </a:rPr>
+              <a:t>Use of Funds:</a:t>
+            </a:r>
+            <a:endParaRPr lang="en-US" sz="2400" dirty="0"/>
+          </a:p>
+          <a:p>
+            <a:pPr lvl="1" marL="685800" indent="-342900">
+              <a:lnSpc>
+                <a:spcPts val="2800"/>
+              </a:lnSpc>
+              <a:buSzPct val="100000"/>
+              <a:buChar char="•"/>
+            </a:pPr>
+            <a:r>
+              <a:rPr lang="en-US" sz="1800" dirty="0">
+                <a:solidFill>
+                  <a:srgbClr val="6B7280"/>
+                </a:solidFill>
+                <a:latin typeface="Calibri" pitchFamily="34" charset="0"/>
+                <a:ea typeface="Calibri" pitchFamily="34" charset="-122"/>
+                <a:cs typeface="Calibri" pitchFamily="34" charset="-120"/>
+              </a:rPr>
+              <a:t>40% - Sales &amp; Marketing (expand sales team from 5 to 20 AEs)</a:t>
+            </a:r>
+            <a:endParaRPr lang="en-US" sz="2400" dirty="0"/>
+          </a:p>
+          <a:p>
+            <a:pPr lvl="1" marL="685800" indent="-342900">
+              <a:lnSpc>
+                <a:spcPts val="2800"/>
+              </a:lnSpc>
+              <a:buSzPct val="100000"/>
+              <a:buChar char="•"/>
+            </a:pPr>
+            <a:r>
+              <a:rPr lang="en-US" sz="1800" dirty="0">
+                <a:solidFill>
+                  <a:srgbClr val="6B7280"/>
+                </a:solidFill>
+                <a:latin typeface="Calibri" pitchFamily="34" charset="0"/>
+                <a:ea typeface="Calibri" pitchFamily="34" charset="-122"/>
+                <a:cs typeface="Calibri" pitchFamily="34" charset="-120"/>
+              </a:rPr>
+              <a:t>35% - Engineering (product expansion, infrastructure)</a:t>
+            </a:r>
+            <a:endParaRPr lang="en-US" sz="2400" dirty="0"/>
+          </a:p>
+          <a:p>
+            <a:pPr lvl="1" marL="685800" indent="-342900">
+              <a:lnSpc>
+                <a:spcPts val="2800"/>
+              </a:lnSpc>
+              <a:buSzPct val="100000"/>
+              <a:buChar char="•"/>
+            </a:pPr>
+            <a:r>
+              <a:rPr lang="en-US" sz="1800" dirty="0">
+                <a:solidFill>
+                  <a:srgbClr val="6B7280"/>
+                </a:solidFill>
+                <a:latin typeface="Calibri" pitchFamily="34" charset="0"/>
+                <a:ea typeface="Calibri" pitchFamily="34" charset="-122"/>
+                <a:cs typeface="Calibri" pitchFamily="34" charset="-120"/>
+              </a:rPr>
+              <a:t>25% - Customer Success (scale CS team to support 100+ enterprise customers)</a:t>
+            </a:r>
+            <a:endParaRPr lang="en-US" sz="2400" dirty="0"/>
           </a:p>
           <a:p>
             <a:pPr marL="342900" indent="-342900">
@@ -2620,32 +2927,115 @@
               <a:buChar char="•"/>
             </a:pPr>
             <a:r>
-              <a:rPr lang="en-US" sz="1600" dirty="0">
-                <a:solidFill>
-                  <a:srgbClr val="374151"/>
-                </a:solidFill>
-              </a:rPr>
-              <a:t>Technical leadership</a:t>
-            </a:r>
-            <a:endParaRPr lang="en-US" sz="1600" dirty="0"/>
-          </a:p>
-          <a:p>
-            <a:pPr marL="342900" indent="-342900">
-              <a:lnSpc>
-                <a:spcPts val="2800"/>
-              </a:lnSpc>
-              <a:buSzPct val="100000"/>
-              <a:buChar char="•"/>
-            </a:pPr>
-            <a:r>
-              <a:rPr lang="en-US" sz="1600" dirty="0">
-                <a:solidFill>
-                  <a:srgbClr val="374151"/>
-                </a:solidFill>
-              </a:rPr>
-              <a:t>Advisory board</a:t>
-            </a:r>
-            <a:endParaRPr lang="en-US" sz="1600" dirty="0"/>
+              <a:rPr lang="en-US" sz="1800" b="1" dirty="0">
+                <a:solidFill>
+                  <a:srgbClr val="1F2937"/>
+                </a:solidFill>
+                <a:latin typeface="Calibri" pitchFamily="34" charset="0"/>
+                <a:ea typeface="Calibri" pitchFamily="34" charset="-122"/>
+                <a:cs typeface="Calibri" pitchFamily="34" charset="-120"/>
+              </a:rPr>
+              <a:t>18-month milestones: $15M ARR, 75 enterprise customers, profitable unit economics</a:t>
+            </a:r>
+            <a:endParaRPr lang="en-US" sz="2400" dirty="0"/>
+          </a:p>
+        </p:txBody>
+      </p:sp>
+      <p:sp>
+        <p:nvSpPr>
+          <p:cNvPr id="6" name="Shape 4"/>
+          <p:cNvSpPr/>
+          <p:nvPr/>
+        </p:nvSpPr>
+        <p:spPr>
+          <a:xfrm>
+            <a:off x="0" y="6720840"/>
+            <a:ext cx="73152" cy="137160"/>
+          </a:xfrm>
+          <a:prstGeom prst="rect">
+            <a:avLst/>
+          </a:prstGeom>
+          <a:solidFill>
+            <a:srgbClr val="38BDF8"/>
+          </a:solidFill>
+          <a:ln/>
+        </p:spPr>
+      </p:sp>
+      <p:sp>
+        <p:nvSpPr>
+          <p:cNvPr id="7" name="Text 5"/>
+          <p:cNvSpPr/>
+          <p:nvPr/>
+        </p:nvSpPr>
+        <p:spPr>
+          <a:xfrm>
+            <a:off x="274320" y="6720840"/>
+            <a:ext cx="2743200" cy="137160"/>
+          </a:xfrm>
+          <a:prstGeom prst="rect">
+            <a:avLst/>
+          </a:prstGeom>
+          <a:noFill/>
+          <a:ln/>
+        </p:spPr>
+        <p:txBody>
+          <a:bodyPr wrap="square" rtlCol="0" anchor="ctr"/>
+          <a:lstStyle/>
+          <a:p>
+            <a:pPr indent="0" marL="0">
+              <a:buNone/>
+            </a:pPr>
+            <a:r>
+              <a:rPr lang="en-US" sz="1000" dirty="0">
+                <a:solidFill>
+                  <a:srgbClr val="6B7280"/>
+                </a:solidFill>
+                <a:latin typeface="Calibri" pitchFamily="34" charset="0"/>
+                <a:ea typeface="Calibri" pitchFamily="34" charset="-122"/>
+                <a:cs typeface="Calibri" pitchFamily="34" charset="-120"/>
+              </a:rPr>
+              <a:t>Creatives Takeover</a:t>
+            </a:r>
+            <a:endParaRPr lang="en-US" sz="1000" dirty="0"/>
+          </a:p>
+        </p:txBody>
+      </p:sp>
+      <p:sp>
+        <p:nvSpPr>
+          <p:cNvPr id="8" name="Text 6"/>
+          <p:cNvSpPr/>
+          <p:nvPr/>
+        </p:nvSpPr>
+        <p:spPr>
+          <a:xfrm>
+            <a:off x="8412480" y="6720840"/>
+            <a:ext cx="274320" cy="137160"/>
+          </a:xfrm>
+          <a:prstGeom prst="rect">
+            <a:avLst/>
+          </a:prstGeom>
+          <a:noFill/>
+          <a:ln/>
+        </p:spPr>
+        <p:txBody>
+          <a:bodyPr wrap="square" rtlCol="0" anchor="ctr"/>
+          <a:lstStyle/>
+          <a:p>
+            <a:pPr algn="r" indent="0" marL="0">
+              <a:buNone/>
+            </a:pPr>
+            <a:r>
+              <a:rPr lang="en-US" sz="1000" dirty="0">
+                <a:solidFill>
+                  <a:srgbClr val="6B7280"/>
+                </a:solidFill>
+                <a:latin typeface="Calibri" pitchFamily="34" charset="0"/>
+                <a:ea typeface="Calibri" pitchFamily="34" charset="-122"/>
+                <a:cs typeface="Calibri" pitchFamily="34" charset="-120"/>
+              </a:rPr>
+              <a:t>12</a:t>
+            </a:r>
+            <a:endParaRPr lang="en-US" sz="1000" dirty="0"/>
           </a:p>
         </p:txBody>
       </p:sp>
@@ -2657,9 +3047,16 @@
 </p:sld>
 </file>
 
-<file path=ppt/slides/slide13.xml><?xml version="1.0" encoding="utf-8"?>
+<file path=ppt/slides/slide2.xml><?xml version="1.0" encoding="utf-8"?>
 <p:sld xmlns:a="http://schemas.openxmlformats.org/drawingml/2006/main" xmlns:r="http://schemas.openxmlformats.org/officeDocument/2006/relationships" xmlns:p="http://schemas.openxmlformats.org/presentationml/2006/main">
-  <p:cSld name="Slide 13">
+  <p:cSld name="Slide 2">
+    <p:bg>
+      <p:bgPr>
+        <a:solidFill>
+          <a:srgbClr val="FFFFFF"/>
+        </a:solidFill>
+      </p:bgPr>
+    </p:bg>
     <p:spTree>
       <p:nvGrpSpPr>
         <p:cNvPr id="1" name=""/>
@@ -2676,14 +3073,34 @@
       </p:grpSpPr>
       <p:sp>
         <p:nvSpPr>
-          <p:cNvPr id="2" name="Text 0"/>
-          <p:cNvSpPr/>
-          <p:nvPr/>
-        </p:nvSpPr>
-        <p:spPr>
-          <a:xfrm>
-            <a:off x="457200" y="457200"/>
-            <a:ext cx="8229600" cy="685800"/>
+          <p:cNvPr id="2" name="Shape 0"/>
+          <p:cNvSpPr/>
+          <p:nvPr/>
+        </p:nvSpPr>
+        <p:spPr>
+          <a:xfrm>
+            <a:off x="0" y="0"/>
+            <a:ext cx="9144000" cy="137160"/>
+          </a:xfrm>
+          <a:prstGeom prst="rect">
+            <a:avLst/>
+          </a:prstGeom>
+          <a:solidFill>
+            <a:srgbClr val="0B1437"/>
+          </a:solidFill>
+          <a:ln/>
+        </p:spPr>
+      </p:sp>
+      <p:sp>
+        <p:nvSpPr>
+          <p:cNvPr id="3" name="Text 1"/>
+          <p:cNvSpPr/>
+          <p:nvPr/>
+        </p:nvSpPr>
+        <p:spPr>
+          <a:xfrm>
+            <a:off x="457200" y="365760"/>
+            <a:ext cx="8229600" cy="548640"/>
           </a:xfrm>
           <a:prstGeom prst="rect">
             <a:avLst/>
@@ -2703,8 +3120,11 @@
                 <a:solidFill>
                   <a:srgbClr val="0B1437"/>
                 </a:solidFill>
-              </a:rPr>
-              <a:t>Financials &amp; Ask</a:t>
+                <a:latin typeface="Calibri" pitchFamily="34" charset="0"/>
+                <a:ea typeface="Calibri" pitchFamily="34" charset="-122"/>
+                <a:cs typeface="Calibri" pitchFamily="34" charset="-120"/>
+              </a:rPr>
+              <a:t>The Enterprise Problem</a:t>
             </a:r>
             <a:endParaRPr lang="en-US" sz="3200" dirty="0"/>
           </a:p>
@@ -2712,7 +3132,46 @@
       </p:sp>
       <p:sp>
         <p:nvSpPr>
-          <p:cNvPr id="3" name="Text 1"/>
+          <p:cNvPr id="4" name="Text 2"/>
+          <p:cNvSpPr/>
+          <p:nvPr/>
+        </p:nvSpPr>
+        <p:spPr>
+          <a:xfrm>
+            <a:off x="457200" y="914400"/>
+            <a:ext cx="8229600" cy="365760"/>
+          </a:xfrm>
+          <a:prstGeom prst="rect">
+            <a:avLst/>
+          </a:prstGeom>
+          <a:noFill/>
+          <a:ln/>
+        </p:spPr>
+        <p:txBody>
+          <a:bodyPr wrap="square" rtlCol="0" anchor="ctr"/>
+          <a:lstStyle/>
+          <a:p>
+            <a:pPr indent="0" marL="0">
+              <a:buNone/>
+            </a:pPr>
+            <a:r>
+              <a:rPr lang="en-US" sz="1600" i="1" dirty="0">
+                <a:solidFill>
+                  <a:srgbClr val="6B7280"/>
+                </a:solidFill>
+                <a:latin typeface="Calibri" pitchFamily="34" charset="0"/>
+                <a:ea typeface="Calibri" pitchFamily="34" charset="-122"/>
+                <a:cs typeface="Calibri" pitchFamily="34" charset="-120"/>
+              </a:rPr>
+              <a:t>What keeps CTOs up at night?</a:t>
+            </a:r>
+            <a:endParaRPr lang="en-US" sz="1600" dirty="0"/>
+          </a:p>
+        </p:txBody>
+      </p:sp>
+      <p:sp>
+        <p:nvSpPr>
+          <p:cNvPr id="5" name="Text 3"/>
           <p:cNvSpPr/>
           <p:nvPr/>
         </p:nvSpPr>
@@ -2739,14 +3198,38 @@
               <a:buChar char="•"/>
             </a:pPr>
             <a:r>
-              <a:rPr lang="en-US" sz="1600" dirty="0">
-                <a:solidFill>
-                  <a:srgbClr val="374151"/>
-                </a:solidFill>
-              </a:rPr>
-              <a:t>Current ARR</a:t>
-            </a:r>
-            <a:endParaRPr lang="en-US" sz="1600" dirty="0"/>
+              <a:rPr lang="en-US" sz="1800" b="1" dirty="0">
+                <a:solidFill>
+                  <a:srgbClr val="1F2937"/>
+                </a:solidFill>
+                <a:latin typeface="Calibri" pitchFamily="34" charset="0"/>
+                <a:ea typeface="Calibri" pitchFamily="34" charset="-122"/>
+                <a:cs typeface="Calibri" pitchFamily="34" charset="-120"/>
+              </a:rPr>
+              <a:t>Enterprise teams waste $500K annually on [problem]</a:t>
+            </a:r>
+            <a:endParaRPr lang="en-US" sz="1800" dirty="0"/>
+          </a:p>
+          <a:p>
+            <a:pPr lvl="1" marL="685800" indent="-342900">
+              <a:lnSpc>
+                <a:spcPts val="2800"/>
+              </a:lnSpc>
+              <a:buSzPct val="100000"/>
+              <a:buChar char="•"/>
+            </a:pPr>
+            <a:r>
+              <a:rPr lang="en-US" sz="1800" dirty="0">
+                <a:solidFill>
+                  <a:srgbClr val="6B7280"/>
+                </a:solidFill>
+                <a:latin typeface="Calibri" pitchFamily="34" charset="0"/>
+                <a:ea typeface="Calibri" pitchFamily="34" charset="-122"/>
+                <a:cs typeface="Calibri" pitchFamily="34" charset="-120"/>
+              </a:rPr>
+              <a:t>Example: "Manual data entry across 15 systems leads to 30% error rate"</a:t>
+            </a:r>
+            <a:endParaRPr lang="en-US" sz="1800" dirty="0"/>
           </a:p>
           <a:p>
             <a:pPr marL="342900" indent="-342900">
@@ -2757,14 +3240,38 @@
               <a:buChar char="•"/>
             </a:pPr>
             <a:r>
-              <a:rPr lang="en-US" sz="1600" dirty="0">
-                <a:solidFill>
-                  <a:srgbClr val="374151"/>
-                </a:solidFill>
-              </a:rPr>
-              <a:t>Growth trajectory</a:t>
-            </a:r>
-            <a:endParaRPr lang="en-US" sz="1600" dirty="0"/>
+              <a:rPr lang="en-US" sz="1800" b="1" dirty="0">
+                <a:solidFill>
+                  <a:srgbClr val="1F2937"/>
+                </a:solidFill>
+                <a:latin typeface="Calibri" pitchFamily="34" charset="0"/>
+                <a:ea typeface="Calibri" pitchFamily="34" charset="-122"/>
+                <a:cs typeface="Calibri" pitchFamily="34" charset="-120"/>
+              </a:rPr>
+              <a:t>Legacy solutions are slow, expensive, and hard to integrate</a:t>
+            </a:r>
+            <a:endParaRPr lang="en-US" sz="1800" dirty="0"/>
+          </a:p>
+          <a:p>
+            <a:pPr lvl="1" marL="685800" indent="-342900">
+              <a:lnSpc>
+                <a:spcPts val="2800"/>
+              </a:lnSpc>
+              <a:buSzPct val="100000"/>
+              <a:buChar char="•"/>
+            </a:pPr>
+            <a:r>
+              <a:rPr lang="en-US" sz="1800" dirty="0">
+                <a:solidFill>
+                  <a:srgbClr val="6B7280"/>
+                </a:solidFill>
+                <a:latin typeface="Calibri" pitchFamily="34" charset="0"/>
+                <a:ea typeface="Calibri" pitchFamily="34" charset="-122"/>
+                <a:cs typeface="Calibri" pitchFamily="34" charset="-120"/>
+              </a:rPr>
+              <a:t>Example: "Current tools take 6 months to deploy and require dedicated IT team"</a:t>
+            </a:r>
+            <a:endParaRPr lang="en-US" sz="1800" dirty="0"/>
           </a:p>
           <a:p>
             <a:pPr marL="342900" indent="-342900">
@@ -2775,68 +3282,136 @@
               <a:buChar char="•"/>
             </a:pPr>
             <a:r>
-              <a:rPr lang="en-US" sz="1600" dirty="0">
-                <a:solidFill>
-                  <a:srgbClr val="374151"/>
-                </a:solidFill>
-              </a:rPr>
-              <a:t>Unit economics</a:t>
-            </a:r>
-            <a:endParaRPr lang="en-US" sz="1600" dirty="0"/>
-          </a:p>
-          <a:p>
-            <a:pPr marL="342900" indent="-342900">
-              <a:lnSpc>
-                <a:spcPts val="2800"/>
-              </a:lnSpc>
-              <a:buSzPct val="100000"/>
-              <a:buChar char="•"/>
-            </a:pPr>
-            <a:r>
-              <a:rPr lang="en-US" sz="1600" dirty="0">
-                <a:solidFill>
-                  <a:srgbClr val="374151"/>
-                </a:solidFill>
-              </a:rPr>
-              <a:t>Raise amount</a:t>
-            </a:r>
-            <a:endParaRPr lang="en-US" sz="1600" dirty="0"/>
-          </a:p>
-          <a:p>
-            <a:pPr marL="342900" indent="-342900">
-              <a:lnSpc>
-                <a:spcPts val="2800"/>
-              </a:lnSpc>
-              <a:buSzPct val="100000"/>
-              <a:buChar char="•"/>
-            </a:pPr>
-            <a:r>
-              <a:rPr lang="en-US" sz="1600" dirty="0">
-                <a:solidFill>
-                  <a:srgbClr val="374151"/>
-                </a:solidFill>
-              </a:rPr>
-              <a:t>Use of funds</a:t>
-            </a:r>
-            <a:endParaRPr lang="en-US" sz="1600" dirty="0"/>
-          </a:p>
-          <a:p>
-            <a:pPr marL="342900" indent="-342900">
-              <a:lnSpc>
-                <a:spcPts val="2800"/>
-              </a:lnSpc>
-              <a:buSzPct val="100000"/>
-              <a:buChar char="•"/>
-            </a:pPr>
-            <a:r>
-              <a:rPr lang="en-US" sz="1600" dirty="0">
-                <a:solidFill>
-                  <a:srgbClr val="374151"/>
-                </a:solidFill>
-              </a:rPr>
-              <a:t>Path to profitability</a:t>
-            </a:r>
-            <a:endParaRPr lang="en-US" sz="1600" dirty="0"/>
+              <a:rPr lang="en-US" sz="1800" b="1" dirty="0">
+                <a:solidFill>
+                  <a:srgbClr val="1F2937"/>
+                </a:solidFill>
+                <a:latin typeface="Calibri" pitchFamily="34" charset="0"/>
+                <a:ea typeface="Calibri" pitchFamily="34" charset="-122"/>
+                <a:cs typeface="Calibri" pitchFamily="34" charset="-120"/>
+              </a:rPr>
+              <a:t>Security and compliance add complexity</a:t>
+            </a:r>
+            <a:endParaRPr lang="en-US" sz="1800" dirty="0"/>
+          </a:p>
+          <a:p>
+            <a:pPr lvl="1" marL="685800" indent="-342900">
+              <a:lnSpc>
+                <a:spcPts val="2800"/>
+              </a:lnSpc>
+              <a:buSzPct val="100000"/>
+              <a:buChar char="•"/>
+            </a:pPr>
+            <a:r>
+              <a:rPr lang="en-US" sz="1800" dirty="0">
+                <a:solidFill>
+                  <a:srgbClr val="6B7280"/>
+                </a:solidFill>
+                <a:latin typeface="Calibri" pitchFamily="34" charset="0"/>
+                <a:ea typeface="Calibri" pitchFamily="34" charset="-122"/>
+                <a:cs typeface="Calibri" pitchFamily="34" charset="-120"/>
+              </a:rPr>
+              <a:t>Example: "GDPR, SOC 2, HIPAA requirements make switching risky"</a:t>
+            </a:r>
+            <a:endParaRPr lang="en-US" sz="1800" dirty="0"/>
+          </a:p>
+        </p:txBody>
+      </p:sp>
+      <p:sp>
+        <p:nvSpPr>
+          <p:cNvPr id="6" name="Shape 4"/>
+          <p:cNvSpPr/>
+          <p:nvPr/>
+        </p:nvSpPr>
+        <p:spPr>
+          <a:xfrm>
+            <a:off x="0" y="6720840"/>
+            <a:ext cx="73152" cy="137160"/>
+          </a:xfrm>
+          <a:prstGeom prst="rect">
+            <a:avLst/>
+          </a:prstGeom>
+          <a:solidFill>
+            <a:srgbClr val="38BDF8"/>
+          </a:solidFill>
+          <a:ln/>
+        </p:spPr>
+      </p:sp>
+      <p:sp>
+        <p:nvSpPr>
+          <p:cNvPr id="7" name="Text 5"/>
+          <p:cNvSpPr/>
+          <p:nvPr/>
+        </p:nvSpPr>
+        <p:spPr>
+          <a:xfrm>
+            <a:off x="274320" y="6720840"/>
+            <a:ext cx="2743200" cy="137160"/>
+          </a:xfrm>
+          <a:prstGeom prst="rect">
+            <a:avLst/>
+          </a:prstGeom>
+          <a:noFill/>
+          <a:ln/>
+        </p:spPr>
+        <p:txBody>
+          <a:bodyPr wrap="square" rtlCol="0" anchor="ctr"/>
+          <a:lstStyle/>
+          <a:p>
+            <a:pPr indent="0" marL="0">
+              <a:buNone/>
+            </a:pPr>
+            <a:r>
+              <a:rPr lang="en-US" sz="1000" dirty="0">
+                <a:solidFill>
+                  <a:srgbClr val="6B7280"/>
+                </a:solidFill>
+                <a:latin typeface="Calibri" pitchFamily="34" charset="0"/>
+                <a:ea typeface="Calibri" pitchFamily="34" charset="-122"/>
+                <a:cs typeface="Calibri" pitchFamily="34" charset="-120"/>
+              </a:rPr>
+              <a:t>Creatives Takeover</a:t>
+            </a:r>
+            <a:endParaRPr lang="en-US" sz="1000" dirty="0"/>
+          </a:p>
+        </p:txBody>
+      </p:sp>
+      <p:sp>
+        <p:nvSpPr>
+          <p:cNvPr id="8" name="Text 6"/>
+          <p:cNvSpPr/>
+          <p:nvPr/>
+        </p:nvSpPr>
+        <p:spPr>
+          <a:xfrm>
+            <a:off x="8412480" y="6720840"/>
+            <a:ext cx="274320" cy="137160"/>
+          </a:xfrm>
+          <a:prstGeom prst="rect">
+            <a:avLst/>
+          </a:prstGeom>
+          <a:noFill/>
+          <a:ln/>
+        </p:spPr>
+        <p:txBody>
+          <a:bodyPr wrap="square" rtlCol="0" anchor="ctr"/>
+          <a:lstStyle/>
+          <a:p>
+            <a:pPr algn="r" indent="0" marL="0">
+              <a:buNone/>
+            </a:pPr>
+            <a:r>
+              <a:rPr lang="en-US" sz="1000" dirty="0">
+                <a:solidFill>
+                  <a:srgbClr val="6B7280"/>
+                </a:solidFill>
+                <a:latin typeface="Calibri" pitchFamily="34" charset="0"/>
+                <a:ea typeface="Calibri" pitchFamily="34" charset="-122"/>
+                <a:cs typeface="Calibri" pitchFamily="34" charset="-120"/>
+              </a:rPr>
+              <a:t>2</a:t>
+            </a:r>
+            <a:endParaRPr lang="en-US" sz="1000" dirty="0"/>
           </a:p>
         </p:txBody>
       </p:sp>
@@ -2848,9 +3423,16 @@
 </p:sld>
 </file>
 
-<file path=ppt/slides/slide2.xml><?xml version="1.0" encoding="utf-8"?>
+<file path=ppt/slides/slide3.xml><?xml version="1.0" encoding="utf-8"?>
 <p:sld xmlns:a="http://schemas.openxmlformats.org/drawingml/2006/main" xmlns:r="http://schemas.openxmlformats.org/officeDocument/2006/relationships" xmlns:p="http://schemas.openxmlformats.org/presentationml/2006/main">
-  <p:cSld name="Slide 2">
+  <p:cSld name="Slide 3">
+    <p:bg>
+      <p:bgPr>
+        <a:solidFill>
+          <a:srgbClr val="FFFFFF"/>
+        </a:solidFill>
+      </p:bgPr>
+    </p:bg>
     <p:spTree>
       <p:nvGrpSpPr>
         <p:cNvPr id="1" name=""/>
@@ -2867,14 +3449,34 @@
       </p:grpSpPr>
       <p:sp>
         <p:nvSpPr>
-          <p:cNvPr id="2" name="Text 0"/>
-          <p:cNvSpPr/>
-          <p:nvPr/>
-        </p:nvSpPr>
-        <p:spPr>
-          <a:xfrm>
-            <a:off x="457200" y="457200"/>
-            <a:ext cx="8229600" cy="685800"/>
+          <p:cNvPr id="2" name="Shape 0"/>
+          <p:cNvSpPr/>
+          <p:nvPr/>
+        </p:nvSpPr>
+        <p:spPr>
+          <a:xfrm>
+            <a:off x="0" y="0"/>
+            <a:ext cx="9144000" cy="137160"/>
+          </a:xfrm>
+          <a:prstGeom prst="rect">
+            <a:avLst/>
+          </a:prstGeom>
+          <a:solidFill>
+            <a:srgbClr val="0B1437"/>
+          </a:solidFill>
+          <a:ln/>
+        </p:spPr>
+      </p:sp>
+      <p:sp>
+        <p:nvSpPr>
+          <p:cNvPr id="3" name="Text 1"/>
+          <p:cNvSpPr/>
+          <p:nvPr/>
+        </p:nvSpPr>
+        <p:spPr>
+          <a:xfrm>
+            <a:off x="457200" y="365760"/>
+            <a:ext cx="8229600" cy="548640"/>
           </a:xfrm>
           <a:prstGeom prst="rect">
             <a:avLst/>
@@ -2894,8 +3496,11 @@
                 <a:solidFill>
                   <a:srgbClr val="0B1437"/>
                 </a:solidFill>
-              </a:rPr>
-              <a:t>Cover Slide</a:t>
+                <a:latin typeface="Calibri" pitchFamily="34" charset="0"/>
+                <a:ea typeface="Calibri" pitchFamily="34" charset="-122"/>
+                <a:cs typeface="Calibri" pitchFamily="34" charset="-120"/>
+              </a:rPr>
+              <a:t>Our Solution</a:t>
             </a:r>
             <a:endParaRPr lang="en-US" sz="3200" dirty="0"/>
           </a:p>
@@ -2903,7 +3508,46 @@
       </p:sp>
       <p:sp>
         <p:nvSpPr>
-          <p:cNvPr id="3" name="Text 1"/>
+          <p:cNvPr id="4" name="Text 2"/>
+          <p:cNvSpPr/>
+          <p:nvPr/>
+        </p:nvSpPr>
+        <p:spPr>
+          <a:xfrm>
+            <a:off x="457200" y="914400"/>
+            <a:ext cx="8229600" cy="365760"/>
+          </a:xfrm>
+          <a:prstGeom prst="rect">
+            <a:avLst/>
+          </a:prstGeom>
+          <a:noFill/>
+          <a:ln/>
+        </p:spPr>
+        <p:txBody>
+          <a:bodyPr wrap="square" rtlCol="0" anchor="ctr"/>
+          <a:lstStyle/>
+          <a:p>
+            <a:pPr indent="0" marL="0">
+              <a:buNone/>
+            </a:pPr>
+            <a:r>
+              <a:rPr lang="en-US" sz="1600" i="1" dirty="0">
+                <a:solidFill>
+                  <a:srgbClr val="6B7280"/>
+                </a:solidFill>
+                <a:latin typeface="Calibri" pitchFamily="34" charset="0"/>
+                <a:ea typeface="Calibri" pitchFamily="34" charset="-122"/>
+                <a:cs typeface="Calibri" pitchFamily="34" charset="-120"/>
+              </a:rPr>
+              <a:t>Modern SaaS built for enterprise scale</a:t>
+            </a:r>
+            <a:endParaRPr lang="en-US" sz="1600" dirty="0"/>
+          </a:p>
+        </p:txBody>
+      </p:sp>
+      <p:sp>
+        <p:nvSpPr>
+          <p:cNvPr id="5" name="Text 3"/>
           <p:cNvSpPr/>
           <p:nvPr/>
         </p:nvSpPr>
@@ -2930,14 +3574,38 @@
               <a:buChar char="•"/>
             </a:pPr>
             <a:r>
-              <a:rPr lang="en-US" sz="1600" dirty="0">
-                <a:solidFill>
-                  <a:srgbClr val="374151"/>
-                </a:solidFill>
-              </a:rPr>
-              <a:t>Company name</a:t>
-            </a:r>
-            <a:endParaRPr lang="en-US" sz="1600" dirty="0"/>
+              <a:rPr lang="en-US" sz="1800" b="1" dirty="0">
+                <a:solidFill>
+                  <a:srgbClr val="1F2937"/>
+                </a:solidFill>
+                <a:latin typeface="Calibri" pitchFamily="34" charset="0"/>
+                <a:ea typeface="Calibri" pitchFamily="34" charset="-122"/>
+                <a:cs typeface="Calibri" pitchFamily="34" charset="-120"/>
+              </a:rPr>
+              <a:t>Cloud-native platform that deploys in days, not months</a:t>
+            </a:r>
+            <a:endParaRPr lang="en-US" sz="1800" dirty="0"/>
+          </a:p>
+          <a:p>
+            <a:pPr lvl="1" marL="685800" indent="-342900">
+              <a:lnSpc>
+                <a:spcPts val="2800"/>
+              </a:lnSpc>
+              <a:buSzPct val="100000"/>
+              <a:buChar char="•"/>
+            </a:pPr>
+            <a:r>
+              <a:rPr lang="en-US" sz="1800" dirty="0">
+                <a:solidFill>
+                  <a:srgbClr val="6B7280"/>
+                </a:solidFill>
+                <a:latin typeface="Calibri" pitchFamily="34" charset="0"/>
+                <a:ea typeface="Calibri" pitchFamily="34" charset="-122"/>
+                <a:cs typeface="Calibri" pitchFamily="34" charset="-120"/>
+              </a:rPr>
+              <a:t>Example: "Average time to value: 14 days vs 6 months for legacy tools"</a:t>
+            </a:r>
+            <a:endParaRPr lang="en-US" sz="1800" dirty="0"/>
           </a:p>
           <a:p>
             <a:pPr marL="342900" indent="-342900">
@@ -2948,14 +3616,38 @@
               <a:buChar char="•"/>
             </a:pPr>
             <a:r>
-              <a:rPr lang="en-US" sz="1600" dirty="0">
-                <a:solidFill>
-                  <a:srgbClr val="374151"/>
-                </a:solidFill>
-              </a:rPr>
-              <a:t>Value proposition</a:t>
-            </a:r>
-            <a:endParaRPr lang="en-US" sz="1600" dirty="0"/>
+              <a:rPr lang="en-US" sz="1800" b="1" dirty="0">
+                <a:solidFill>
+                  <a:srgbClr val="1F2937"/>
+                </a:solidFill>
+                <a:latin typeface="Calibri" pitchFamily="34" charset="0"/>
+                <a:ea typeface="Calibri" pitchFamily="34" charset="-122"/>
+                <a:cs typeface="Calibri" pitchFamily="34" charset="-120"/>
+              </a:rPr>
+              <a:t>API-first architecture integrates with your existing stack</a:t>
+            </a:r>
+            <a:endParaRPr lang="en-US" sz="1800" dirty="0"/>
+          </a:p>
+          <a:p>
+            <a:pPr lvl="1" marL="685800" indent="-342900">
+              <a:lnSpc>
+                <a:spcPts val="2800"/>
+              </a:lnSpc>
+              <a:buSzPct val="100000"/>
+              <a:buChar char="•"/>
+            </a:pPr>
+            <a:r>
+              <a:rPr lang="en-US" sz="1800" dirty="0">
+                <a:solidFill>
+                  <a:srgbClr val="6B7280"/>
+                </a:solidFill>
+                <a:latin typeface="Calibri" pitchFamily="34" charset="0"/>
+                <a:ea typeface="Calibri" pitchFamily="34" charset="-122"/>
+                <a:cs typeface="Calibri" pitchFamily="34" charset="-120"/>
+              </a:rPr>
+              <a:t>Example: "Pre-built connectors for Salesforce, ServiceNow, Workday, and 50+ tools"</a:t>
+            </a:r>
+            <a:endParaRPr lang="en-US" sz="1800" dirty="0"/>
           </a:p>
           <a:p>
             <a:pPr marL="342900" indent="-342900">
@@ -2966,32 +3658,136 @@
               <a:buChar char="•"/>
             </a:pPr>
             <a:r>
-              <a:rPr lang="en-US" sz="1600" dirty="0">
-                <a:solidFill>
-                  <a:srgbClr val="374151"/>
-                </a:solidFill>
-              </a:rPr>
-              <a:t>Founded year</a:t>
-            </a:r>
-            <a:endParaRPr lang="en-US" sz="1600" dirty="0"/>
-          </a:p>
-          <a:p>
-            <a:pPr marL="342900" indent="-342900">
-              <a:lnSpc>
-                <a:spcPts val="2800"/>
-              </a:lnSpc>
-              <a:buSzPct val="100000"/>
-              <a:buChar char="•"/>
-            </a:pPr>
-            <a:r>
-              <a:rPr lang="en-US" sz="1600" dirty="0">
-                <a:solidFill>
-                  <a:srgbClr val="374151"/>
-                </a:solidFill>
-              </a:rPr>
-              <a:t>Contact info</a:t>
-            </a:r>
-            <a:endParaRPr lang="en-US" sz="1600" dirty="0"/>
+              <a:rPr lang="en-US" sz="1800" b="1" dirty="0">
+                <a:solidFill>
+                  <a:srgbClr val="1F2937"/>
+                </a:solidFill>
+                <a:latin typeface="Calibri" pitchFamily="34" charset="0"/>
+                <a:ea typeface="Calibri" pitchFamily="34" charset="-122"/>
+                <a:cs typeface="Calibri" pitchFamily="34" charset="-120"/>
+              </a:rPr>
+              <a:t>Enterprise-grade security built in from day one</a:t>
+            </a:r>
+            <a:endParaRPr lang="en-US" sz="1800" dirty="0"/>
+          </a:p>
+          <a:p>
+            <a:pPr lvl="1" marL="685800" indent="-342900">
+              <a:lnSpc>
+                <a:spcPts val="2800"/>
+              </a:lnSpc>
+              <a:buSzPct val="100000"/>
+              <a:buChar char="•"/>
+            </a:pPr>
+            <a:r>
+              <a:rPr lang="en-US" sz="1800" dirty="0">
+                <a:solidFill>
+                  <a:srgbClr val="6B7280"/>
+                </a:solidFill>
+                <a:latin typeface="Calibri" pitchFamily="34" charset="0"/>
+                <a:ea typeface="Calibri" pitchFamily="34" charset="-122"/>
+                <a:cs typeface="Calibri" pitchFamily="34" charset="-120"/>
+              </a:rPr>
+              <a:t>Example: "SOC 2 Type II, GDPR compliant, SSO/SAML support"</a:t>
+            </a:r>
+            <a:endParaRPr lang="en-US" sz="1800" dirty="0"/>
+          </a:p>
+        </p:txBody>
+      </p:sp>
+      <p:sp>
+        <p:nvSpPr>
+          <p:cNvPr id="6" name="Shape 4"/>
+          <p:cNvSpPr/>
+          <p:nvPr/>
+        </p:nvSpPr>
+        <p:spPr>
+          <a:xfrm>
+            <a:off x="0" y="6720840"/>
+            <a:ext cx="73152" cy="137160"/>
+          </a:xfrm>
+          <a:prstGeom prst="rect">
+            <a:avLst/>
+          </a:prstGeom>
+          <a:solidFill>
+            <a:srgbClr val="38BDF8"/>
+          </a:solidFill>
+          <a:ln/>
+        </p:spPr>
+      </p:sp>
+      <p:sp>
+        <p:nvSpPr>
+          <p:cNvPr id="7" name="Text 5"/>
+          <p:cNvSpPr/>
+          <p:nvPr/>
+        </p:nvSpPr>
+        <p:spPr>
+          <a:xfrm>
+            <a:off x="274320" y="6720840"/>
+            <a:ext cx="2743200" cy="137160"/>
+          </a:xfrm>
+          <a:prstGeom prst="rect">
+            <a:avLst/>
+          </a:prstGeom>
+          <a:noFill/>
+          <a:ln/>
+        </p:spPr>
+        <p:txBody>
+          <a:bodyPr wrap="square" rtlCol="0" anchor="ctr"/>
+          <a:lstStyle/>
+          <a:p>
+            <a:pPr indent="0" marL="0">
+              <a:buNone/>
+            </a:pPr>
+            <a:r>
+              <a:rPr lang="en-US" sz="1000" dirty="0">
+                <a:solidFill>
+                  <a:srgbClr val="6B7280"/>
+                </a:solidFill>
+                <a:latin typeface="Calibri" pitchFamily="34" charset="0"/>
+                <a:ea typeface="Calibri" pitchFamily="34" charset="-122"/>
+                <a:cs typeface="Calibri" pitchFamily="34" charset="-120"/>
+              </a:rPr>
+              <a:t>Creatives Takeover</a:t>
+            </a:r>
+            <a:endParaRPr lang="en-US" sz="1000" dirty="0"/>
+          </a:p>
+        </p:txBody>
+      </p:sp>
+      <p:sp>
+        <p:nvSpPr>
+          <p:cNvPr id="8" name="Text 6"/>
+          <p:cNvSpPr/>
+          <p:nvPr/>
+        </p:nvSpPr>
+        <p:spPr>
+          <a:xfrm>
+            <a:off x="8412480" y="6720840"/>
+            <a:ext cx="274320" cy="137160"/>
+          </a:xfrm>
+          <a:prstGeom prst="rect">
+            <a:avLst/>
+          </a:prstGeom>
+          <a:noFill/>
+          <a:ln/>
+        </p:spPr>
+        <p:txBody>
+          <a:bodyPr wrap="square" rtlCol="0" anchor="ctr"/>
+          <a:lstStyle/>
+          <a:p>
+            <a:pPr algn="r" indent="0" marL="0">
+              <a:buNone/>
+            </a:pPr>
+            <a:r>
+              <a:rPr lang="en-US" sz="1000" dirty="0">
+                <a:solidFill>
+                  <a:srgbClr val="6B7280"/>
+                </a:solidFill>
+                <a:latin typeface="Calibri" pitchFamily="34" charset="0"/>
+                <a:ea typeface="Calibri" pitchFamily="34" charset="-122"/>
+                <a:cs typeface="Calibri" pitchFamily="34" charset="-120"/>
+              </a:rPr>
+              <a:t>3</a:t>
+            </a:r>
+            <a:endParaRPr lang="en-US" sz="1000" dirty="0"/>
           </a:p>
         </p:txBody>
       </p:sp>
@@ -3003,9 +3799,16 @@
 </p:sld>
 </file>
 
-<file path=ppt/slides/slide3.xml><?xml version="1.0" encoding="utf-8"?>
+<file path=ppt/slides/slide4.xml><?xml version="1.0" encoding="utf-8"?>
 <p:sld xmlns:a="http://schemas.openxmlformats.org/drawingml/2006/main" xmlns:r="http://schemas.openxmlformats.org/officeDocument/2006/relationships" xmlns:p="http://schemas.openxmlformats.org/presentationml/2006/main">
-  <p:cSld name="Slide 3">
+  <p:cSld name="Slide 4">
+    <p:bg>
+      <p:bgPr>
+        <a:solidFill>
+          <a:srgbClr val="FFFFFF"/>
+        </a:solidFill>
+      </p:bgPr>
+    </p:bg>
     <p:spTree>
       <p:nvGrpSpPr>
         <p:cNvPr id="1" name=""/>
@@ -3022,14 +3825,34 @@
       </p:grpSpPr>
       <p:sp>
         <p:nvSpPr>
-          <p:cNvPr id="2" name="Text 0"/>
-          <p:cNvSpPr/>
-          <p:nvPr/>
-        </p:nvSpPr>
-        <p:spPr>
-          <a:xfrm>
-            <a:off x="457200" y="457200"/>
-            <a:ext cx="8229600" cy="685800"/>
+          <p:cNvPr id="2" name="Shape 0"/>
+          <p:cNvSpPr/>
+          <p:nvPr/>
+        </p:nvSpPr>
+        <p:spPr>
+          <a:xfrm>
+            <a:off x="0" y="0"/>
+            <a:ext cx="9144000" cy="137160"/>
+          </a:xfrm>
+          <a:prstGeom prst="rect">
+            <a:avLst/>
+          </a:prstGeom>
+          <a:solidFill>
+            <a:srgbClr val="0B1437"/>
+          </a:solidFill>
+          <a:ln/>
+        </p:spPr>
+      </p:sp>
+      <p:sp>
+        <p:nvSpPr>
+          <p:cNvPr id="3" name="Text 1"/>
+          <p:cNvSpPr/>
+          <p:nvPr/>
+        </p:nvSpPr>
+        <p:spPr>
+          <a:xfrm>
+            <a:off x="457200" y="365760"/>
+            <a:ext cx="8229600" cy="548640"/>
           </a:xfrm>
           <a:prstGeom prst="rect">
             <a:avLst/>
@@ -3049,8 +3872,11 @@
                 <a:solidFill>
                   <a:srgbClr val="0B1437"/>
                 </a:solidFill>
-              </a:rPr>
-              <a:t>Problem</a:t>
+                <a:latin typeface="Calibri" pitchFamily="34" charset="0"/>
+                <a:ea typeface="Calibri" pitchFamily="34" charset="-122"/>
+                <a:cs typeface="Calibri" pitchFamily="34" charset="-120"/>
+              </a:rPr>
+              <a:t>Key Capabilities</a:t>
             </a:r>
             <a:endParaRPr lang="en-US" sz="3200" dirty="0"/>
           </a:p>
@@ -3058,7 +3884,46 @@
       </p:sp>
       <p:sp>
         <p:nvSpPr>
-          <p:cNvPr id="3" name="Text 1"/>
+          <p:cNvPr id="4" name="Text 2"/>
+          <p:cNvSpPr/>
+          <p:nvPr/>
+        </p:nvSpPr>
+        <p:spPr>
+          <a:xfrm>
+            <a:off x="457200" y="914400"/>
+            <a:ext cx="8229600" cy="365760"/>
+          </a:xfrm>
+          <a:prstGeom prst="rect">
+            <a:avLst/>
+          </a:prstGeom>
+          <a:noFill/>
+          <a:ln/>
+        </p:spPr>
+        <p:txBody>
+          <a:bodyPr wrap="square" rtlCol="0" anchor="ctr"/>
+          <a:lstStyle/>
+          <a:p>
+            <a:pPr indent="0" marL="0">
+              <a:buNone/>
+            </a:pPr>
+            <a:r>
+              <a:rPr lang="en-US" sz="1600" i="1" dirty="0">
+                <a:solidFill>
+                  <a:srgbClr val="6B7280"/>
+                </a:solidFill>
+                <a:latin typeface="Calibri" pitchFamily="34" charset="0"/>
+                <a:ea typeface="Calibri" pitchFamily="34" charset="-122"/>
+                <a:cs typeface="Calibri" pitchFamily="34" charset="-120"/>
+              </a:rPr>
+              <a:t>What makes us different</a:t>
+            </a:r>
+            <a:endParaRPr lang="en-US" sz="1600" dirty="0"/>
+          </a:p>
+        </p:txBody>
+      </p:sp>
+      <p:sp>
+        <p:nvSpPr>
+          <p:cNvPr id="5" name="Text 3"/>
           <p:cNvSpPr/>
           <p:nvPr/>
         </p:nvSpPr>
@@ -3085,14 +3950,38 @@
               <a:buChar char="•"/>
             </a:pPr>
             <a:r>
-              <a:rPr lang="en-US" sz="1600" dirty="0">
-                <a:solidFill>
-                  <a:srgbClr val="374151"/>
-                </a:solidFill>
-              </a:rPr>
-              <a:t>Business problem you solve</a:t>
-            </a:r>
-            <a:endParaRPr lang="en-US" sz="1600" dirty="0"/>
+              <a:rPr lang="en-US" sz="1800" b="1" dirty="0">
+                <a:solidFill>
+                  <a:srgbClr val="1F2937"/>
+                </a:solidFill>
+                <a:latin typeface="Calibri" pitchFamily="34" charset="0"/>
+                <a:ea typeface="Calibri" pitchFamily="34" charset="-122"/>
+                <a:cs typeface="Calibri" pitchFamily="34" charset="-120"/>
+              </a:rPr>
+              <a:t>AI-Powered Automation: Reduce manual work by 80%</a:t>
+            </a:r>
+            <a:endParaRPr lang="en-US" sz="1800" dirty="0"/>
+          </a:p>
+          <a:p>
+            <a:pPr lvl="1" marL="685800" indent="-342900">
+              <a:lnSpc>
+                <a:spcPts val="2800"/>
+              </a:lnSpc>
+              <a:buSzPct val="100000"/>
+              <a:buChar char="•"/>
+            </a:pPr>
+            <a:r>
+              <a:rPr lang="en-US" sz="1800" dirty="0">
+                <a:solidFill>
+                  <a:srgbClr val="6B7280"/>
+                </a:solidFill>
+                <a:latin typeface="Calibri" pitchFamily="34" charset="0"/>
+                <a:ea typeface="Calibri" pitchFamily="34" charset="-122"/>
+                <a:cs typeface="Calibri" pitchFamily="34" charset="-120"/>
+              </a:rPr>
+              <a:t>Example: "Auto-classify 10,000 records in minutes with 95% accuracy"</a:t>
+            </a:r>
+            <a:endParaRPr lang="en-US" sz="1800" dirty="0"/>
           </a:p>
           <a:p>
             <a:pPr marL="342900" indent="-342900">
@@ -3103,14 +3992,38 @@
               <a:buChar char="•"/>
             </a:pPr>
             <a:r>
-              <a:rPr lang="en-US" sz="1600" dirty="0">
-                <a:solidFill>
-                  <a:srgbClr val="374151"/>
-                </a:solidFill>
-              </a:rPr>
-              <a:t>Cost of the problem</a:t>
-            </a:r>
-            <a:endParaRPr lang="en-US" sz="1600" dirty="0"/>
+              <a:rPr lang="en-US" sz="1800" b="1" dirty="0">
+                <a:solidFill>
+                  <a:srgbClr val="1F2937"/>
+                </a:solidFill>
+                <a:latin typeface="Calibri" pitchFamily="34" charset="0"/>
+                <a:ea typeface="Calibri" pitchFamily="34" charset="-122"/>
+                <a:cs typeface="Calibri" pitchFamily="34" charset="-120"/>
+              </a:rPr>
+              <a:t>Real-Time Analytics: Instant insights across all data sources</a:t>
+            </a:r>
+            <a:endParaRPr lang="en-US" sz="1800" dirty="0"/>
+          </a:p>
+          <a:p>
+            <a:pPr lvl="1" marL="685800" indent="-342900">
+              <a:lnSpc>
+                <a:spcPts val="2800"/>
+              </a:lnSpc>
+              <a:buSzPct val="100000"/>
+              <a:buChar char="•"/>
+            </a:pPr>
+            <a:r>
+              <a:rPr lang="en-US" sz="1800" dirty="0">
+                <a:solidFill>
+                  <a:srgbClr val="6B7280"/>
+                </a:solidFill>
+                <a:latin typeface="Calibri" pitchFamily="34" charset="0"/>
+                <a:ea typeface="Calibri" pitchFamily="34" charset="-122"/>
+                <a:cs typeface="Calibri" pitchFamily="34" charset="-120"/>
+              </a:rPr>
+              <a:t>Example: "Unified dashboard shows trends across sales, support, and product"</a:t>
+            </a:r>
+            <a:endParaRPr lang="en-US" sz="1800" dirty="0"/>
           </a:p>
           <a:p>
             <a:pPr marL="342900" indent="-342900">
@@ -3121,32 +4034,136 @@
               <a:buChar char="•"/>
             </a:pPr>
             <a:r>
-              <a:rPr lang="en-US" sz="1600" dirty="0">
-                <a:solidFill>
-                  <a:srgbClr val="374151"/>
-                </a:solidFill>
-              </a:rPr>
-              <a:t>Who in organization feels it</a:t>
-            </a:r>
-            <a:endParaRPr lang="en-US" sz="1600" dirty="0"/>
-          </a:p>
-          <a:p>
-            <a:pPr marL="342900" indent="-342900">
-              <a:lnSpc>
-                <a:spcPts val="2800"/>
-              </a:lnSpc>
-              <a:buSzPct val="100000"/>
-              <a:buChar char="•"/>
-            </a:pPr>
-            <a:r>
-              <a:rPr lang="en-US" sz="1600" dirty="0">
-                <a:solidFill>
-                  <a:srgbClr val="374151"/>
-                </a:solidFill>
-              </a:rPr>
-              <a:t>Current inadequate solutions</a:t>
-            </a:r>
-            <a:endParaRPr lang="en-US" sz="1600" dirty="0"/>
+              <a:rPr lang="en-US" sz="1800" b="1" dirty="0">
+                <a:solidFill>
+                  <a:srgbClr val="1F2937"/>
+                </a:solidFill>
+                <a:latin typeface="Calibri" pitchFamily="34" charset="0"/>
+                <a:ea typeface="Calibri" pitchFamily="34" charset="-122"/>
+                <a:cs typeface="Calibri" pitchFamily="34" charset="-120"/>
+              </a:rPr>
+              <a:t>White-Glove Onboarding: Dedicated success team</a:t>
+            </a:r>
+            <a:endParaRPr lang="en-US" sz="1800" dirty="0"/>
+          </a:p>
+          <a:p>
+            <a:pPr lvl="1" marL="685800" indent="-342900">
+              <a:lnSpc>
+                <a:spcPts val="2800"/>
+              </a:lnSpc>
+              <a:buSzPct val="100000"/>
+              <a:buChar char="•"/>
+            </a:pPr>
+            <a:r>
+              <a:rPr lang="en-US" sz="1800" dirty="0">
+                <a:solidFill>
+                  <a:srgbClr val="6B7280"/>
+                </a:solidFill>
+                <a:latin typeface="Calibri" pitchFamily="34" charset="0"/>
+                <a:ea typeface="Calibri" pitchFamily="34" charset="-122"/>
+                <a:cs typeface="Calibri" pitchFamily="34" charset="-120"/>
+              </a:rPr>
+              <a:t>Example: "CSM + implementation engineer ensure smooth rollout"</a:t>
+            </a:r>
+            <a:endParaRPr lang="en-US" sz="1800" dirty="0"/>
+          </a:p>
+        </p:txBody>
+      </p:sp>
+      <p:sp>
+        <p:nvSpPr>
+          <p:cNvPr id="6" name="Shape 4"/>
+          <p:cNvSpPr/>
+          <p:nvPr/>
+        </p:nvSpPr>
+        <p:spPr>
+          <a:xfrm>
+            <a:off x="0" y="6720840"/>
+            <a:ext cx="73152" cy="137160"/>
+          </a:xfrm>
+          <a:prstGeom prst="rect">
+            <a:avLst/>
+          </a:prstGeom>
+          <a:solidFill>
+            <a:srgbClr val="38BDF8"/>
+          </a:solidFill>
+          <a:ln/>
+        </p:spPr>
+      </p:sp>
+      <p:sp>
+        <p:nvSpPr>
+          <p:cNvPr id="7" name="Text 5"/>
+          <p:cNvSpPr/>
+          <p:nvPr/>
+        </p:nvSpPr>
+        <p:spPr>
+          <a:xfrm>
+            <a:off x="274320" y="6720840"/>
+            <a:ext cx="2743200" cy="137160"/>
+          </a:xfrm>
+          <a:prstGeom prst="rect">
+            <a:avLst/>
+          </a:prstGeom>
+          <a:noFill/>
+          <a:ln/>
+        </p:spPr>
+        <p:txBody>
+          <a:bodyPr wrap="square" rtlCol="0" anchor="ctr"/>
+          <a:lstStyle/>
+          <a:p>
+            <a:pPr indent="0" marL="0">
+              <a:buNone/>
+            </a:pPr>
+            <a:r>
+              <a:rPr lang="en-US" sz="1000" dirty="0">
+                <a:solidFill>
+                  <a:srgbClr val="6B7280"/>
+                </a:solidFill>
+                <a:latin typeface="Calibri" pitchFamily="34" charset="0"/>
+                <a:ea typeface="Calibri" pitchFamily="34" charset="-122"/>
+                <a:cs typeface="Calibri" pitchFamily="34" charset="-120"/>
+              </a:rPr>
+              <a:t>Creatives Takeover</a:t>
+            </a:r>
+            <a:endParaRPr lang="en-US" sz="1000" dirty="0"/>
+          </a:p>
+        </p:txBody>
+      </p:sp>
+      <p:sp>
+        <p:nvSpPr>
+          <p:cNvPr id="8" name="Text 6"/>
+          <p:cNvSpPr/>
+          <p:nvPr/>
+        </p:nvSpPr>
+        <p:spPr>
+          <a:xfrm>
+            <a:off x="8412480" y="6720840"/>
+            <a:ext cx="274320" cy="137160"/>
+          </a:xfrm>
+          <a:prstGeom prst="rect">
+            <a:avLst/>
+          </a:prstGeom>
+          <a:noFill/>
+          <a:ln/>
+        </p:spPr>
+        <p:txBody>
+          <a:bodyPr wrap="square" rtlCol="0" anchor="ctr"/>
+          <a:lstStyle/>
+          <a:p>
+            <a:pPr algn="r" indent="0" marL="0">
+              <a:buNone/>
+            </a:pPr>
+            <a:r>
+              <a:rPr lang="en-US" sz="1000" dirty="0">
+                <a:solidFill>
+                  <a:srgbClr val="6B7280"/>
+                </a:solidFill>
+                <a:latin typeface="Calibri" pitchFamily="34" charset="0"/>
+                <a:ea typeface="Calibri" pitchFamily="34" charset="-122"/>
+                <a:cs typeface="Calibri" pitchFamily="34" charset="-120"/>
+              </a:rPr>
+              <a:t>4</a:t>
+            </a:r>
+            <a:endParaRPr lang="en-US" sz="1000" dirty="0"/>
           </a:p>
         </p:txBody>
       </p:sp>
@@ -3158,9 +4175,16 @@
 </p:sld>
 </file>
 
-<file path=ppt/slides/slide4.xml><?xml version="1.0" encoding="utf-8"?>
+<file path=ppt/slides/slide5.xml><?xml version="1.0" encoding="utf-8"?>
 <p:sld xmlns:a="http://schemas.openxmlformats.org/drawingml/2006/main" xmlns:r="http://schemas.openxmlformats.org/officeDocument/2006/relationships" xmlns:p="http://schemas.openxmlformats.org/presentationml/2006/main">
-  <p:cSld name="Slide 4">
+  <p:cSld name="Slide 5">
+    <p:bg>
+      <p:bgPr>
+        <a:solidFill>
+          <a:srgbClr val="FFFFFF"/>
+        </a:solidFill>
+      </p:bgPr>
+    </p:bg>
     <p:spTree>
       <p:nvGrpSpPr>
         <p:cNvPr id="1" name=""/>
@@ -3177,14 +4201,34 @@
       </p:grpSpPr>
       <p:sp>
         <p:nvSpPr>
-          <p:cNvPr id="2" name="Text 0"/>
-          <p:cNvSpPr/>
-          <p:nvPr/>
-        </p:nvSpPr>
-        <p:spPr>
-          <a:xfrm>
-            <a:off x="457200" y="457200"/>
-            <a:ext cx="8229600" cy="685800"/>
+          <p:cNvPr id="2" name="Shape 0"/>
+          <p:cNvSpPr/>
+          <p:nvPr/>
+        </p:nvSpPr>
+        <p:spPr>
+          <a:xfrm>
+            <a:off x="0" y="0"/>
+            <a:ext cx="9144000" cy="137160"/>
+          </a:xfrm>
+          <a:prstGeom prst="rect">
+            <a:avLst/>
+          </a:prstGeom>
+          <a:solidFill>
+            <a:srgbClr val="0B1437"/>
+          </a:solidFill>
+          <a:ln/>
+        </p:spPr>
+      </p:sp>
+      <p:sp>
+        <p:nvSpPr>
+          <p:cNvPr id="3" name="Text 1"/>
+          <p:cNvSpPr/>
+          <p:nvPr/>
+        </p:nvSpPr>
+        <p:spPr>
+          <a:xfrm>
+            <a:off x="457200" y="365760"/>
+            <a:ext cx="8229600" cy="548640"/>
           </a:xfrm>
           <a:prstGeom prst="rect">
             <a:avLst/>
@@ -3204,8 +4248,11 @@
                 <a:solidFill>
                   <a:srgbClr val="0B1437"/>
                 </a:solidFill>
-              </a:rPr>
-              <a:t>Solution</a:t>
+                <a:latin typeface="Calibri" pitchFamily="34" charset="0"/>
+                <a:ea typeface="Calibri" pitchFamily="34" charset="-122"/>
+                <a:cs typeface="Calibri" pitchFamily="34" charset="-120"/>
+              </a:rPr>
+              <a:t>Market Opportunity</a:t>
             </a:r>
             <a:endParaRPr lang="en-US" sz="3200" dirty="0"/>
           </a:p>
@@ -3213,7 +4260,46 @@
       </p:sp>
       <p:sp>
         <p:nvSpPr>
-          <p:cNvPr id="3" name="Text 1"/>
+          <p:cNvPr id="4" name="Text 2"/>
+          <p:cNvSpPr/>
+          <p:nvPr/>
+        </p:nvSpPr>
+        <p:spPr>
+          <a:xfrm>
+            <a:off x="457200" y="914400"/>
+            <a:ext cx="8229600" cy="365760"/>
+          </a:xfrm>
+          <a:prstGeom prst="rect">
+            <a:avLst/>
+          </a:prstGeom>
+          <a:noFill/>
+          <a:ln/>
+        </p:spPr>
+        <p:txBody>
+          <a:bodyPr wrap="square" rtlCol="0" anchor="ctr"/>
+          <a:lstStyle/>
+          <a:p>
+            <a:pPr indent="0" marL="0">
+              <a:buNone/>
+            </a:pPr>
+            <a:r>
+              <a:rPr lang="en-US" sz="1600" i="1" dirty="0">
+                <a:solidFill>
+                  <a:srgbClr val="6B7280"/>
+                </a:solidFill>
+                <a:latin typeface="Calibri" pitchFamily="34" charset="0"/>
+                <a:ea typeface="Calibri" pitchFamily="34" charset="-122"/>
+                <a:cs typeface="Calibri" pitchFamily="34" charset="-120"/>
+              </a:rPr>
+              <a:t>Large and growing</a:t>
+            </a:r>
+            <a:endParaRPr lang="en-US" sz="1600" dirty="0"/>
+          </a:p>
+        </p:txBody>
+      </p:sp>
+      <p:sp>
+        <p:nvSpPr>
+          <p:cNvPr id="5" name="Text 3"/>
           <p:cNvSpPr/>
           <p:nvPr/>
         </p:nvSpPr>
@@ -3240,14 +4326,17 @@
               <a:buChar char="•"/>
             </a:pPr>
             <a:r>
-              <a:rPr lang="en-US" sz="1600" dirty="0">
-                <a:solidFill>
-                  <a:srgbClr val="374151"/>
-                </a:solidFill>
-              </a:rPr>
-              <a:t>Platform overview</a:t>
-            </a:r>
-            <a:endParaRPr lang="en-US" sz="1600" dirty="0"/>
+              <a:rPr lang="en-US" sz="1800" b="1" dirty="0">
+                <a:solidFill>
+                  <a:srgbClr val="1F2937"/>
+                </a:solidFill>
+                <a:latin typeface="Calibri" pitchFamily="34" charset="0"/>
+                <a:ea typeface="Calibri" pitchFamily="34" charset="-122"/>
+                <a:cs typeface="Calibri" pitchFamily="34" charset="-120"/>
+              </a:rPr>
+              <a:t>TAM: $25B (enterprise [category] software)</a:t>
+            </a:r>
+            <a:endParaRPr lang="en-US" sz="1800" dirty="0"/>
           </a:p>
           <a:p>
             <a:pPr marL="342900" indent="-342900">
@@ -3258,14 +4347,17 @@
               <a:buChar char="•"/>
             </a:pPr>
             <a:r>
-              <a:rPr lang="en-US" sz="1600" dirty="0">
-                <a:solidFill>
-                  <a:srgbClr val="374151"/>
-                </a:solidFill>
-              </a:rPr>
-              <a:t>Key capabilities</a:t>
-            </a:r>
-            <a:endParaRPr lang="en-US" sz="1600" dirty="0"/>
+              <a:rPr lang="en-US" sz="1800" b="1" dirty="0">
+                <a:solidFill>
+                  <a:srgbClr val="1F2937"/>
+                </a:solidFill>
+                <a:latin typeface="Calibri" pitchFamily="34" charset="0"/>
+                <a:ea typeface="Calibri" pitchFamily="34" charset="-122"/>
+                <a:cs typeface="Calibri" pitchFamily="34" charset="-120"/>
+              </a:rPr>
+              <a:t>Growing at 18% annually driven by digital transformation</a:t>
+            </a:r>
+            <a:endParaRPr lang="en-US" sz="1800" dirty="0"/>
           </a:p>
           <a:p>
             <a:pPr marL="342900" indent="-342900">
@@ -3276,14 +4368,17 @@
               <a:buChar char="•"/>
             </a:pPr>
             <a:r>
-              <a:rPr lang="en-US" sz="1600" dirty="0">
-                <a:solidFill>
-                  <a:srgbClr val="374151"/>
-                </a:solidFill>
-              </a:rPr>
-              <a:t>Integration ecosystem</a:t>
-            </a:r>
-            <a:endParaRPr lang="en-US" sz="1600" dirty="0"/>
+              <a:rPr lang="en-US" sz="1800" b="1" dirty="0">
+                <a:solidFill>
+                  <a:srgbClr val="1F2937"/>
+                </a:solidFill>
+                <a:latin typeface="Calibri" pitchFamily="34" charset="0"/>
+                <a:ea typeface="Calibri" pitchFamily="34" charset="-122"/>
+                <a:cs typeface="Calibri" pitchFamily="34" charset="-120"/>
+              </a:rPr>
+              <a:t>SAM: $5B (mid-market and enterprise companies with 500+ employees)</a:t>
+            </a:r>
+            <a:endParaRPr lang="en-US" sz="1800" dirty="0"/>
           </a:p>
           <a:p>
             <a:pPr marL="342900" indent="-342900">
@@ -3294,14 +4389,136 @@
               <a:buChar char="•"/>
             </a:pPr>
             <a:r>
-              <a:rPr lang="en-US" sz="1600" dirty="0">
-                <a:solidFill>
-                  <a:srgbClr val="374151"/>
-                </a:solidFill>
-              </a:rPr>
-              <a:t>Deployment options</a:t>
-            </a:r>
-            <a:endParaRPr lang="en-US" sz="1600" dirty="0"/>
+              <a:rPr lang="en-US" sz="1800" b="1" dirty="0">
+                <a:solidFill>
+                  <a:srgbClr val="1F2937"/>
+                </a:solidFill>
+                <a:latin typeface="Calibri" pitchFamily="34" charset="0"/>
+                <a:ea typeface="Calibri" pitchFamily="34" charset="-122"/>
+                <a:cs typeface="Calibri" pitchFamily="34" charset="-120"/>
+              </a:rPr>
+              <a:t>SOM: $500M target in 5 years</a:t>
+            </a:r>
+            <a:endParaRPr lang="en-US" sz="1800" dirty="0"/>
+          </a:p>
+          <a:p>
+            <a:pPr lvl="1" marL="685800" indent="-342900">
+              <a:lnSpc>
+                <a:spcPts val="2800"/>
+              </a:lnSpc>
+              <a:buSzPct val="100000"/>
+              <a:buChar char="•"/>
+            </a:pPr>
+            <a:r>
+              <a:rPr lang="en-US" sz="1800" dirty="0">
+                <a:solidFill>
+                  <a:srgbClr val="6B7280"/>
+                </a:solidFill>
+                <a:latin typeface="Calibri" pitchFamily="34" charset="0"/>
+                <a:ea typeface="Calibri" pitchFamily="34" charset="-122"/>
+                <a:cs typeface="Calibri" pitchFamily="34" charset="-120"/>
+              </a:rPr>
+              <a:t>Example: "10,000 target companies × $50K average ACV = $500M opportunity"</a:t>
+            </a:r>
+            <a:endParaRPr lang="en-US" sz="1800" dirty="0"/>
+          </a:p>
+        </p:txBody>
+      </p:sp>
+      <p:sp>
+        <p:nvSpPr>
+          <p:cNvPr id="6" name="Shape 4"/>
+          <p:cNvSpPr/>
+          <p:nvPr/>
+        </p:nvSpPr>
+        <p:spPr>
+          <a:xfrm>
+            <a:off x="0" y="6720840"/>
+            <a:ext cx="73152" cy="137160"/>
+          </a:xfrm>
+          <a:prstGeom prst="rect">
+            <a:avLst/>
+          </a:prstGeom>
+          <a:solidFill>
+            <a:srgbClr val="38BDF8"/>
+          </a:solidFill>
+          <a:ln/>
+        </p:spPr>
+      </p:sp>
+      <p:sp>
+        <p:nvSpPr>
+          <p:cNvPr id="7" name="Text 5"/>
+          <p:cNvSpPr/>
+          <p:nvPr/>
+        </p:nvSpPr>
+        <p:spPr>
+          <a:xfrm>
+            <a:off x="274320" y="6720840"/>
+            <a:ext cx="2743200" cy="137160"/>
+          </a:xfrm>
+          <a:prstGeom prst="rect">
+            <a:avLst/>
+          </a:prstGeom>
+          <a:noFill/>
+          <a:ln/>
+        </p:spPr>
+        <p:txBody>
+          <a:bodyPr wrap="square" rtlCol="0" anchor="ctr"/>
+          <a:lstStyle/>
+          <a:p>
+            <a:pPr indent="0" marL="0">
+              <a:buNone/>
+            </a:pPr>
+            <a:r>
+              <a:rPr lang="en-US" sz="1000" dirty="0">
+                <a:solidFill>
+                  <a:srgbClr val="6B7280"/>
+                </a:solidFill>
+                <a:latin typeface="Calibri" pitchFamily="34" charset="0"/>
+                <a:ea typeface="Calibri" pitchFamily="34" charset="-122"/>
+                <a:cs typeface="Calibri" pitchFamily="34" charset="-120"/>
+              </a:rPr>
+              <a:t>Creatives Takeover</a:t>
+            </a:r>
+            <a:endParaRPr lang="en-US" sz="1000" dirty="0"/>
+          </a:p>
+        </p:txBody>
+      </p:sp>
+      <p:sp>
+        <p:nvSpPr>
+          <p:cNvPr id="8" name="Text 6"/>
+          <p:cNvSpPr/>
+          <p:nvPr/>
+        </p:nvSpPr>
+        <p:spPr>
+          <a:xfrm>
+            <a:off x="8412480" y="6720840"/>
+            <a:ext cx="274320" cy="137160"/>
+          </a:xfrm>
+          <a:prstGeom prst="rect">
+            <a:avLst/>
+          </a:prstGeom>
+          <a:noFill/>
+          <a:ln/>
+        </p:spPr>
+        <p:txBody>
+          <a:bodyPr wrap="square" rtlCol="0" anchor="ctr"/>
+          <a:lstStyle/>
+          <a:p>
+            <a:pPr algn="r" indent="0" marL="0">
+              <a:buNone/>
+            </a:pPr>
+            <a:r>
+              <a:rPr lang="en-US" sz="1000" dirty="0">
+                <a:solidFill>
+                  <a:srgbClr val="6B7280"/>
+                </a:solidFill>
+                <a:latin typeface="Calibri" pitchFamily="34" charset="0"/>
+                <a:ea typeface="Calibri" pitchFamily="34" charset="-122"/>
+                <a:cs typeface="Calibri" pitchFamily="34" charset="-120"/>
+              </a:rPr>
+              <a:t>5</a:t>
+            </a:r>
+            <a:endParaRPr lang="en-US" sz="1000" dirty="0"/>
           </a:p>
         </p:txBody>
       </p:sp>
@@ -3313,9 +4530,16 @@
 </p:sld>
 </file>
 
-<file path=ppt/slides/slide5.xml><?xml version="1.0" encoding="utf-8"?>
+<file path=ppt/slides/slide6.xml><?xml version="1.0" encoding="utf-8"?>
 <p:sld xmlns:a="http://schemas.openxmlformats.org/drawingml/2006/main" xmlns:r="http://schemas.openxmlformats.org/officeDocument/2006/relationships" xmlns:p="http://schemas.openxmlformats.org/presentationml/2006/main">
-  <p:cSld name="Slide 5">
+  <p:cSld name="Slide 6">
+    <p:bg>
+      <p:bgPr>
+        <a:solidFill>
+          <a:srgbClr val="FFFFFF"/>
+        </a:solidFill>
+      </p:bgPr>
+    </p:bg>
     <p:spTree>
       <p:nvGrpSpPr>
         <p:cNvPr id="1" name=""/>
@@ -3332,14 +4556,34 @@
       </p:grpSpPr>
       <p:sp>
         <p:nvSpPr>
-          <p:cNvPr id="2" name="Text 0"/>
-          <p:cNvSpPr/>
-          <p:nvPr/>
-        </p:nvSpPr>
-        <p:spPr>
-          <a:xfrm>
-            <a:off x="457200" y="457200"/>
-            <a:ext cx="8229600" cy="685800"/>
+          <p:cNvPr id="2" name="Shape 0"/>
+          <p:cNvSpPr/>
+          <p:nvPr/>
+        </p:nvSpPr>
+        <p:spPr>
+          <a:xfrm>
+            <a:off x="0" y="0"/>
+            <a:ext cx="9144000" cy="137160"/>
+          </a:xfrm>
+          <a:prstGeom prst="rect">
+            <a:avLst/>
+          </a:prstGeom>
+          <a:solidFill>
+            <a:srgbClr val="0B1437"/>
+          </a:solidFill>
+          <a:ln/>
+        </p:spPr>
+      </p:sp>
+      <p:sp>
+        <p:nvSpPr>
+          <p:cNvPr id="3" name="Text 1"/>
+          <p:cNvSpPr/>
+          <p:nvPr/>
+        </p:nvSpPr>
+        <p:spPr>
+          <a:xfrm>
+            <a:off x="457200" y="365760"/>
+            <a:ext cx="8229600" cy="548640"/>
           </a:xfrm>
           <a:prstGeom prst="rect">
             <a:avLst/>
@@ -3359,8 +4603,11 @@
                 <a:solidFill>
                   <a:srgbClr val="0B1437"/>
                 </a:solidFill>
-              </a:rPr>
-              <a:t>Why Now</a:t>
+                <a:latin typeface="Calibri" pitchFamily="34" charset="0"/>
+                <a:ea typeface="Calibri" pitchFamily="34" charset="-122"/>
+                <a:cs typeface="Calibri" pitchFamily="34" charset="-120"/>
+              </a:rPr>
+              <a:t>Business Model</a:t>
             </a:r>
             <a:endParaRPr lang="en-US" sz="3200" dirty="0"/>
           </a:p>
@@ -3368,7 +4615,46 @@
       </p:sp>
       <p:sp>
         <p:nvSpPr>
-          <p:cNvPr id="3" name="Text 1"/>
+          <p:cNvPr id="4" name="Text 2"/>
+          <p:cNvSpPr/>
+          <p:nvPr/>
+        </p:nvSpPr>
+        <p:spPr>
+          <a:xfrm>
+            <a:off x="457200" y="914400"/>
+            <a:ext cx="8229600" cy="365760"/>
+          </a:xfrm>
+          <a:prstGeom prst="rect">
+            <a:avLst/>
+          </a:prstGeom>
+          <a:noFill/>
+          <a:ln/>
+        </p:spPr>
+        <p:txBody>
+          <a:bodyPr wrap="square" rtlCol="0" anchor="ctr"/>
+          <a:lstStyle/>
+          <a:p>
+            <a:pPr indent="0" marL="0">
+              <a:buNone/>
+            </a:pPr>
+            <a:r>
+              <a:rPr lang="en-US" sz="1600" i="1" dirty="0">
+                <a:solidFill>
+                  <a:srgbClr val="6B7280"/>
+                </a:solidFill>
+                <a:latin typeface="Calibri" pitchFamily="34" charset="0"/>
+                <a:ea typeface="Calibri" pitchFamily="34" charset="-122"/>
+                <a:cs typeface="Calibri" pitchFamily="34" charset="-120"/>
+              </a:rPr>
+              <a:t>Enterprise SaaS economics</a:t>
+            </a:r>
+            <a:endParaRPr lang="en-US" sz="1600" dirty="0"/>
+          </a:p>
+        </p:txBody>
+      </p:sp>
+      <p:sp>
+        <p:nvSpPr>
+          <p:cNvPr id="5" name="Text 3"/>
           <p:cNvSpPr/>
           <p:nvPr/>
         </p:nvSpPr>
@@ -3395,14 +4681,17 @@
               <a:buChar char="•"/>
             </a:pPr>
             <a:r>
-              <a:rPr lang="en-US" sz="1600" dirty="0">
-                <a:solidFill>
-                  <a:srgbClr val="374151"/>
-                </a:solidFill>
-              </a:rPr>
-              <a:t>Digital transformation trends</a:t>
-            </a:r>
-            <a:endParaRPr lang="en-US" sz="1600" dirty="0"/>
+              <a:rPr lang="en-US" sz="1800" b="1" dirty="0">
+                <a:solidFill>
+                  <a:srgbClr val="1F2937"/>
+                </a:solidFill>
+                <a:latin typeface="Calibri" pitchFamily="34" charset="0"/>
+                <a:ea typeface="Calibri" pitchFamily="34" charset="-122"/>
+                <a:cs typeface="Calibri" pitchFamily="34" charset="-120"/>
+              </a:rPr>
+              <a:t>Pricing: $50K - $500K annual contracts based on usage</a:t>
+            </a:r>
+            <a:endParaRPr lang="en-US" sz="1800" dirty="0"/>
           </a:p>
           <a:p>
             <a:pPr marL="342900" indent="-342900">
@@ -3413,14 +4702,80 @@
               <a:buChar char="•"/>
             </a:pPr>
             <a:r>
-              <a:rPr lang="en-US" sz="1600" dirty="0">
-                <a:solidFill>
-                  <a:srgbClr val="374151"/>
-                </a:solidFill>
-              </a:rPr>
-              <a:t>Remote work drivers</a:t>
-            </a:r>
-            <a:endParaRPr lang="en-US" sz="1600" dirty="0"/>
+              <a:rPr lang="en-US" sz="1800" b="1" dirty="0">
+                <a:solidFill>
+                  <a:srgbClr val="1F2937"/>
+                </a:solidFill>
+                <a:latin typeface="Calibri" pitchFamily="34" charset="0"/>
+                <a:ea typeface="Calibri" pitchFamily="34" charset="-122"/>
+                <a:cs typeface="Calibri" pitchFamily="34" charset="-120"/>
+              </a:rPr>
+              <a:t>Example tiers:</a:t>
+            </a:r>
+            <a:endParaRPr lang="en-US" sz="1800" dirty="0"/>
+          </a:p>
+          <a:p>
+            <a:pPr lvl="1" marL="685800" indent="-342900">
+              <a:lnSpc>
+                <a:spcPts val="2800"/>
+              </a:lnSpc>
+              <a:buSzPct val="100000"/>
+              <a:buChar char="•"/>
+            </a:pPr>
+            <a:r>
+              <a:rPr lang="en-US" sz="1800" dirty="0">
+                <a:solidFill>
+                  <a:srgbClr val="6B7280"/>
+                </a:solidFill>
+                <a:latin typeface="Calibri" pitchFamily="34" charset="0"/>
+                <a:ea typeface="Calibri" pitchFamily="34" charset="-122"/>
+                <a:cs typeface="Calibri" pitchFamily="34" charset="-120"/>
+              </a:rPr>
+              <a:t>Growth: $50K/year (up to 1,000 users)</a:t>
+            </a:r>
+            <a:endParaRPr lang="en-US" sz="1800" dirty="0"/>
+          </a:p>
+          <a:p>
+            <a:pPr lvl="1" marL="685800" indent="-342900">
+              <a:lnSpc>
+                <a:spcPts val="2800"/>
+              </a:lnSpc>
+              <a:buSzPct val="100000"/>
+              <a:buChar char="•"/>
+            </a:pPr>
+            <a:r>
+              <a:rPr lang="en-US" sz="1800" dirty="0">
+                <a:solidFill>
+                  <a:srgbClr val="6B7280"/>
+                </a:solidFill>
+                <a:latin typeface="Calibri" pitchFamily="34" charset="0"/>
+                <a:ea typeface="Calibri" pitchFamily="34" charset="-122"/>
+                <a:cs typeface="Calibri" pitchFamily="34" charset="-120"/>
+              </a:rPr>
+              <a:t>Enterprise: $200K/year (up to 5,000 users)</a:t>
+            </a:r>
+            <a:endParaRPr lang="en-US" sz="1800" dirty="0"/>
+          </a:p>
+          <a:p>
+            <a:pPr lvl="1" marL="685800" indent="-342900">
+              <a:lnSpc>
+                <a:spcPts val="2800"/>
+              </a:lnSpc>
+              <a:buSzPct val="100000"/>
+              <a:buChar char="•"/>
+            </a:pPr>
+            <a:r>
+              <a:rPr lang="en-US" sz="1800" dirty="0">
+                <a:solidFill>
+                  <a:srgbClr val="6B7280"/>
+                </a:solidFill>
+                <a:latin typeface="Calibri" pitchFamily="34" charset="0"/>
+                <a:ea typeface="Calibri" pitchFamily="34" charset="-122"/>
+                <a:cs typeface="Calibri" pitchFamily="34" charset="-120"/>
+              </a:rPr>
+              <a:t>Custom: $500K+ (unlimited users, dedicated infra)</a:t>
+            </a:r>
+            <a:endParaRPr lang="en-US" sz="1800" dirty="0"/>
           </a:p>
           <a:p>
             <a:pPr marL="342900" indent="-342900">
@@ -3431,32 +4786,178 @@
               <a:buChar char="•"/>
             </a:pPr>
             <a:r>
-              <a:rPr lang="en-US" sz="1600" dirty="0">
-                <a:solidFill>
-                  <a:srgbClr val="374151"/>
-                </a:solidFill>
-              </a:rPr>
-              <a:t>Technology enablers</a:t>
-            </a:r>
-            <a:endParaRPr lang="en-US" sz="1600" dirty="0"/>
-          </a:p>
-          <a:p>
-            <a:pPr marL="342900" indent="-342900">
-              <a:lnSpc>
-                <a:spcPts val="2800"/>
-              </a:lnSpc>
-              <a:buSzPct val="100000"/>
-              <a:buChar char="•"/>
-            </a:pPr>
-            <a:r>
-              <a:rPr lang="en-US" sz="1600" dirty="0">
-                <a:solidFill>
-                  <a:srgbClr val="374151"/>
-                </a:solidFill>
-              </a:rPr>
-              <a:t>Regulatory changes</a:t>
-            </a:r>
-            <a:endParaRPr lang="en-US" sz="1600" dirty="0"/>
+              <a:rPr lang="en-US" sz="1800" b="1" dirty="0">
+                <a:solidFill>
+                  <a:srgbClr val="1F2937"/>
+                </a:solidFill>
+                <a:latin typeface="Calibri" pitchFamily="34" charset="0"/>
+                <a:ea typeface="Calibri" pitchFamily="34" charset="-122"/>
+                <a:cs typeface="Calibri" pitchFamily="34" charset="-120"/>
+              </a:rPr>
+              <a:t>Strong unit economics:</a:t>
+            </a:r>
+            <a:endParaRPr lang="en-US" sz="1800" dirty="0"/>
+          </a:p>
+          <a:p>
+            <a:pPr lvl="1" marL="685800" indent="-342900">
+              <a:lnSpc>
+                <a:spcPts val="2800"/>
+              </a:lnSpc>
+              <a:buSzPct val="100000"/>
+              <a:buChar char="•"/>
+            </a:pPr>
+            <a:r>
+              <a:rPr lang="en-US" sz="1800" dirty="0">
+                <a:solidFill>
+                  <a:srgbClr val="6B7280"/>
+                </a:solidFill>
+                <a:latin typeface="Calibri" pitchFamily="34" charset="0"/>
+                <a:ea typeface="Calibri" pitchFamily="34" charset="-122"/>
+                <a:cs typeface="Calibri" pitchFamily="34" charset="-120"/>
+              </a:rPr>
+              <a:t>CAC: $15K (sales + marketing)</a:t>
+            </a:r>
+            <a:endParaRPr lang="en-US" sz="1800" dirty="0"/>
+          </a:p>
+          <a:p>
+            <a:pPr lvl="1" marL="685800" indent="-342900">
+              <a:lnSpc>
+                <a:spcPts val="2800"/>
+              </a:lnSpc>
+              <a:buSzPct val="100000"/>
+              <a:buChar char="•"/>
+            </a:pPr>
+            <a:r>
+              <a:rPr lang="en-US" sz="1800" dirty="0">
+                <a:solidFill>
+                  <a:srgbClr val="6B7280"/>
+                </a:solidFill>
+                <a:latin typeface="Calibri" pitchFamily="34" charset="0"/>
+                <a:ea typeface="Calibri" pitchFamily="34" charset="-122"/>
+                <a:cs typeface="Calibri" pitchFamily="34" charset="-120"/>
+              </a:rPr>
+              <a:t>LTV: $300K (5-year avg retention)</a:t>
+            </a:r>
+            <a:endParaRPr lang="en-US" sz="1800" dirty="0"/>
+          </a:p>
+          <a:p>
+            <a:pPr lvl="1" marL="685800" indent="-342900">
+              <a:lnSpc>
+                <a:spcPts val="2800"/>
+              </a:lnSpc>
+              <a:buSzPct val="100000"/>
+              <a:buChar char="•"/>
+            </a:pPr>
+            <a:r>
+              <a:rPr lang="en-US" sz="1800" dirty="0">
+                <a:solidFill>
+                  <a:srgbClr val="10B981"/>
+                </a:solidFill>
+                <a:latin typeface="Calibri" pitchFamily="34" charset="0"/>
+                <a:ea typeface="Calibri" pitchFamily="34" charset="-122"/>
+                <a:cs typeface="Calibri" pitchFamily="34" charset="-120"/>
+              </a:rPr>
+              <a:t>LTV:CAC = 20:1</a:t>
+            </a:r>
+            <a:endParaRPr lang="en-US" sz="1800" dirty="0"/>
+          </a:p>
+        </p:txBody>
+      </p:sp>
+      <p:sp>
+        <p:nvSpPr>
+          <p:cNvPr id="6" name="Shape 4"/>
+          <p:cNvSpPr/>
+          <p:nvPr/>
+        </p:nvSpPr>
+        <p:spPr>
+          <a:xfrm>
+            <a:off x="0" y="6720840"/>
+            <a:ext cx="73152" cy="137160"/>
+          </a:xfrm>
+          <a:prstGeom prst="rect">
+            <a:avLst/>
+          </a:prstGeom>
+          <a:solidFill>
+            <a:srgbClr val="38BDF8"/>
+          </a:solidFill>
+          <a:ln/>
+        </p:spPr>
+      </p:sp>
+      <p:sp>
+        <p:nvSpPr>
+          <p:cNvPr id="7" name="Text 5"/>
+          <p:cNvSpPr/>
+          <p:nvPr/>
+        </p:nvSpPr>
+        <p:spPr>
+          <a:xfrm>
+            <a:off x="274320" y="6720840"/>
+            <a:ext cx="2743200" cy="137160"/>
+          </a:xfrm>
+          <a:prstGeom prst="rect">
+            <a:avLst/>
+          </a:prstGeom>
+          <a:noFill/>
+          <a:ln/>
+        </p:spPr>
+        <p:txBody>
+          <a:bodyPr wrap="square" rtlCol="0" anchor="ctr"/>
+          <a:lstStyle/>
+          <a:p>
+            <a:pPr indent="0" marL="0">
+              <a:buNone/>
+            </a:pPr>
+            <a:r>
+              <a:rPr lang="en-US" sz="1000" dirty="0">
+                <a:solidFill>
+                  <a:srgbClr val="6B7280"/>
+                </a:solidFill>
+                <a:latin typeface="Calibri" pitchFamily="34" charset="0"/>
+                <a:ea typeface="Calibri" pitchFamily="34" charset="-122"/>
+                <a:cs typeface="Calibri" pitchFamily="34" charset="-120"/>
+              </a:rPr>
+              <a:t>Creatives Takeover</a:t>
+            </a:r>
+            <a:endParaRPr lang="en-US" sz="1000" dirty="0"/>
+          </a:p>
+        </p:txBody>
+      </p:sp>
+      <p:sp>
+        <p:nvSpPr>
+          <p:cNvPr id="8" name="Text 6"/>
+          <p:cNvSpPr/>
+          <p:nvPr/>
+        </p:nvSpPr>
+        <p:spPr>
+          <a:xfrm>
+            <a:off x="8412480" y="6720840"/>
+            <a:ext cx="274320" cy="137160"/>
+          </a:xfrm>
+          <a:prstGeom prst="rect">
+            <a:avLst/>
+          </a:prstGeom>
+          <a:noFill/>
+          <a:ln/>
+        </p:spPr>
+        <p:txBody>
+          <a:bodyPr wrap="square" rtlCol="0" anchor="ctr"/>
+          <a:lstStyle/>
+          <a:p>
+            <a:pPr algn="r" indent="0" marL="0">
+              <a:buNone/>
+            </a:pPr>
+            <a:r>
+              <a:rPr lang="en-US" sz="1000" dirty="0">
+                <a:solidFill>
+                  <a:srgbClr val="6B7280"/>
+                </a:solidFill>
+                <a:latin typeface="Calibri" pitchFamily="34" charset="0"/>
+                <a:ea typeface="Calibri" pitchFamily="34" charset="-122"/>
+                <a:cs typeface="Calibri" pitchFamily="34" charset="-120"/>
+              </a:rPr>
+              <a:t>6</a:t>
+            </a:r>
+            <a:endParaRPr lang="en-US" sz="1000" dirty="0"/>
           </a:p>
         </p:txBody>
       </p:sp>
@@ -3468,9 +4969,16 @@
 </p:sld>
 </file>
 
-<file path=ppt/slides/slide6.xml><?xml version="1.0" encoding="utf-8"?>
+<file path=ppt/slides/slide7.xml><?xml version="1.0" encoding="utf-8"?>
 <p:sld xmlns:a="http://schemas.openxmlformats.org/drawingml/2006/main" xmlns:r="http://schemas.openxmlformats.org/officeDocument/2006/relationships" xmlns:p="http://schemas.openxmlformats.org/presentationml/2006/main">
-  <p:cSld name="Slide 6">
+  <p:cSld name="Slide 7">
+    <p:bg>
+      <p:bgPr>
+        <a:solidFill>
+          <a:srgbClr val="FFFFFF"/>
+        </a:solidFill>
+      </p:bgPr>
+    </p:bg>
     <p:spTree>
       <p:nvGrpSpPr>
         <p:cNvPr id="1" name=""/>
@@ -3487,14 +4995,34 @@
       </p:grpSpPr>
       <p:sp>
         <p:nvSpPr>
-          <p:cNvPr id="2" name="Text 0"/>
-          <p:cNvSpPr/>
-          <p:nvPr/>
-        </p:nvSpPr>
-        <p:spPr>
-          <a:xfrm>
-            <a:off x="457200" y="457200"/>
-            <a:ext cx="8229600" cy="685800"/>
+          <p:cNvPr id="2" name="Shape 0"/>
+          <p:cNvSpPr/>
+          <p:nvPr/>
+        </p:nvSpPr>
+        <p:spPr>
+          <a:xfrm>
+            <a:off x="0" y="0"/>
+            <a:ext cx="9144000" cy="137160"/>
+          </a:xfrm>
+          <a:prstGeom prst="rect">
+            <a:avLst/>
+          </a:prstGeom>
+          <a:solidFill>
+            <a:srgbClr val="0B1437"/>
+          </a:solidFill>
+          <a:ln/>
+        </p:spPr>
+      </p:sp>
+      <p:sp>
+        <p:nvSpPr>
+          <p:cNvPr id="3" name="Text 1"/>
+          <p:cNvSpPr/>
+          <p:nvPr/>
+        </p:nvSpPr>
+        <p:spPr>
+          <a:xfrm>
+            <a:off x="457200" y="365760"/>
+            <a:ext cx="8229600" cy="548640"/>
           </a:xfrm>
           <a:prstGeom prst="rect">
             <a:avLst/>
@@ -3514,8 +5042,11 @@
                 <a:solidFill>
                   <a:srgbClr val="0B1437"/>
                 </a:solidFill>
-              </a:rPr>
-              <a:t>Product</a:t>
+                <a:latin typeface="Calibri" pitchFamily="34" charset="0"/>
+                <a:ea typeface="Calibri" pitchFamily="34" charset="-122"/>
+                <a:cs typeface="Calibri" pitchFamily="34" charset="-120"/>
+              </a:rPr>
+              <a:t>Go-to-Market Strategy</a:t>
             </a:r>
             <a:endParaRPr lang="en-US" sz="3200" dirty="0"/>
           </a:p>
@@ -3523,7 +5054,46 @@
       </p:sp>
       <p:sp>
         <p:nvSpPr>
-          <p:cNvPr id="3" name="Text 1"/>
+          <p:cNvPr id="4" name="Text 2"/>
+          <p:cNvSpPr/>
+          <p:nvPr/>
+        </p:nvSpPr>
+        <p:spPr>
+          <a:xfrm>
+            <a:off x="457200" y="914400"/>
+            <a:ext cx="8229600" cy="365760"/>
+          </a:xfrm>
+          <a:prstGeom prst="rect">
+            <a:avLst/>
+          </a:prstGeom>
+          <a:noFill/>
+          <a:ln/>
+        </p:spPr>
+        <p:txBody>
+          <a:bodyPr wrap="square" rtlCol="0" anchor="ctr"/>
+          <a:lstStyle/>
+          <a:p>
+            <a:pPr indent="0" marL="0">
+              <a:buNone/>
+            </a:pPr>
+            <a:r>
+              <a:rPr lang="en-US" sz="1600" i="1" dirty="0">
+                <a:solidFill>
+                  <a:srgbClr val="6B7280"/>
+                </a:solidFill>
+                <a:latin typeface="Calibri" pitchFamily="34" charset="0"/>
+                <a:ea typeface="Calibri" pitchFamily="34" charset="-122"/>
+                <a:cs typeface="Calibri" pitchFamily="34" charset="-120"/>
+              </a:rPr>
+              <a:t>Enterprise sales playbook</a:t>
+            </a:r>
+            <a:endParaRPr lang="en-US" sz="1600" dirty="0"/>
+          </a:p>
+        </p:txBody>
+      </p:sp>
+      <p:sp>
+        <p:nvSpPr>
+          <p:cNvPr id="5" name="Text 3"/>
           <p:cNvSpPr/>
           <p:nvPr/>
         </p:nvSpPr>
@@ -3550,14 +5120,38 @@
               <a:buChar char="•"/>
             </a:pPr>
             <a:r>
-              <a:rPr lang="en-US" sz="1600" dirty="0">
-                <a:solidFill>
-                  <a:srgbClr val="374151"/>
-                </a:solidFill>
-              </a:rPr>
-              <a:t>Core modules</a:t>
-            </a:r>
-            <a:endParaRPr lang="en-US" sz="1600" dirty="0"/>
+              <a:rPr lang="en-US" sz="1800" b="1" dirty="0">
+                <a:solidFill>
+                  <a:srgbClr val="1F2937"/>
+                </a:solidFill>
+                <a:latin typeface="Calibri" pitchFamily="34" charset="0"/>
+                <a:ea typeface="Calibri" pitchFamily="34" charset="-122"/>
+                <a:cs typeface="Calibri" pitchFamily="34" charset="-120"/>
+              </a:rPr>
+              <a:t>Phase 1: Land - Target mid-market companies (500-2,000 employees)</a:t>
+            </a:r>
+            <a:endParaRPr lang="en-US" sz="1800" dirty="0"/>
+          </a:p>
+          <a:p>
+            <a:pPr lvl="1" marL="685800" indent="-342900">
+              <a:lnSpc>
+                <a:spcPts val="2800"/>
+              </a:lnSpc>
+              <a:buSzPct val="100000"/>
+              <a:buChar char="•"/>
+            </a:pPr>
+            <a:r>
+              <a:rPr lang="en-US" sz="1800" dirty="0">
+                <a:solidFill>
+                  <a:srgbClr val="6B7280"/>
+                </a:solidFill>
+                <a:latin typeface="Calibri" pitchFamily="34" charset="0"/>
+                <a:ea typeface="Calibri" pitchFamily="34" charset="-122"/>
+                <a:cs typeface="Calibri" pitchFamily="34" charset="-120"/>
+              </a:rPr>
+              <a:t>Example: "Start with VP Engineering or CTO, prove ROI in 1 department"</a:t>
+            </a:r>
+            <a:endParaRPr lang="en-US" sz="1800" dirty="0"/>
           </a:p>
           <a:p>
             <a:pPr marL="342900" indent="-342900">
@@ -3568,14 +5162,38 @@
               <a:buChar char="•"/>
             </a:pPr>
             <a:r>
-              <a:rPr lang="en-US" sz="1600" dirty="0">
-                <a:solidFill>
-                  <a:srgbClr val="374151"/>
-                </a:solidFill>
-              </a:rPr>
-              <a:t>Workflow automation</a:t>
-            </a:r>
-            <a:endParaRPr lang="en-US" sz="1600" dirty="0"/>
+              <a:rPr lang="en-US" sz="1800" b="1" dirty="0">
+                <a:solidFill>
+                  <a:srgbClr val="1F2937"/>
+                </a:solidFill>
+                <a:latin typeface="Calibri" pitchFamily="34" charset="0"/>
+                <a:ea typeface="Calibri" pitchFamily="34" charset="-122"/>
+                <a:cs typeface="Calibri" pitchFamily="34" charset="-120"/>
+              </a:rPr>
+              <a:t>Phase 2: Expand - Grow within existing accounts</a:t>
+            </a:r>
+            <a:endParaRPr lang="en-US" sz="1800" dirty="0"/>
+          </a:p>
+          <a:p>
+            <a:pPr lvl="1" marL="685800" indent="-342900">
+              <a:lnSpc>
+                <a:spcPts val="2800"/>
+              </a:lnSpc>
+              <a:buSzPct val="100000"/>
+              <a:buChar char="•"/>
+            </a:pPr>
+            <a:r>
+              <a:rPr lang="en-US" sz="1800" dirty="0">
+                <a:solidFill>
+                  <a:srgbClr val="6B7280"/>
+                </a:solidFill>
+                <a:latin typeface="Calibri" pitchFamily="34" charset="0"/>
+                <a:ea typeface="Calibri" pitchFamily="34" charset="-122"/>
+                <a:cs typeface="Calibri" pitchFamily="34" charset="-120"/>
+              </a:rPr>
+              <a:t>Example: "Add more teams/departments, upsell premium features"</a:t>
+            </a:r>
+            <a:endParaRPr lang="en-US" sz="1800" dirty="0"/>
           </a:p>
           <a:p>
             <a:pPr marL="342900" indent="-342900">
@@ -3586,32 +5204,136 @@
               <a:buChar char="•"/>
             </a:pPr>
             <a:r>
-              <a:rPr lang="en-US" sz="1600" dirty="0">
-                <a:solidFill>
-                  <a:srgbClr val="374151"/>
-                </a:solidFill>
-              </a:rPr>
-              <a:t>Reporting/analytics</a:t>
-            </a:r>
-            <a:endParaRPr lang="en-US" sz="1600" dirty="0"/>
-          </a:p>
-          <a:p>
-            <a:pPr marL="342900" indent="-342900">
-              <a:lnSpc>
-                <a:spcPts val="2800"/>
-              </a:lnSpc>
-              <a:buSzPct val="100000"/>
-              <a:buChar char="•"/>
-            </a:pPr>
-            <a:r>
-              <a:rPr lang="en-US" sz="1600" dirty="0">
-                <a:solidFill>
-                  <a:srgbClr val="374151"/>
-                </a:solidFill>
-              </a:rPr>
-              <a:t>Admin controls</a:t>
-            </a:r>
-            <a:endParaRPr lang="en-US" sz="1600" dirty="0"/>
+              <a:rPr lang="en-US" sz="1800" b="1" dirty="0">
+                <a:solidFill>
+                  <a:srgbClr val="1F2937"/>
+                </a:solidFill>
+                <a:latin typeface="Calibri" pitchFamily="34" charset="0"/>
+                <a:ea typeface="Calibri" pitchFamily="34" charset="-122"/>
+                <a:cs typeface="Calibri" pitchFamily="34" charset="-120"/>
+              </a:rPr>
+              <a:t>Phase 3: Enterprise - Move upmarket to Fortune 500</a:t>
+            </a:r>
+            <a:endParaRPr lang="en-US" sz="1800" dirty="0"/>
+          </a:p>
+          <a:p>
+            <a:pPr lvl="1" marL="685800" indent="-342900">
+              <a:lnSpc>
+                <a:spcPts val="2800"/>
+              </a:lnSpc>
+              <a:buSzPct val="100000"/>
+              <a:buChar char="•"/>
+            </a:pPr>
+            <a:r>
+              <a:rPr lang="en-US" sz="1800" dirty="0">
+                <a:solidFill>
+                  <a:srgbClr val="6B7280"/>
+                </a:solidFill>
+                <a:latin typeface="Calibri" pitchFamily="34" charset="0"/>
+                <a:ea typeface="Calibri" pitchFamily="34" charset="-122"/>
+                <a:cs typeface="Calibri" pitchFamily="34" charset="-120"/>
+              </a:rPr>
+              <a:t>Example: "Leverage case studies and references to close $500K+ deals"</a:t>
+            </a:r>
+            <a:endParaRPr lang="en-US" sz="1800" dirty="0"/>
+          </a:p>
+        </p:txBody>
+      </p:sp>
+      <p:sp>
+        <p:nvSpPr>
+          <p:cNvPr id="6" name="Shape 4"/>
+          <p:cNvSpPr/>
+          <p:nvPr/>
+        </p:nvSpPr>
+        <p:spPr>
+          <a:xfrm>
+            <a:off x="0" y="6720840"/>
+            <a:ext cx="73152" cy="137160"/>
+          </a:xfrm>
+          <a:prstGeom prst="rect">
+            <a:avLst/>
+          </a:prstGeom>
+          <a:solidFill>
+            <a:srgbClr val="38BDF8"/>
+          </a:solidFill>
+          <a:ln/>
+        </p:spPr>
+      </p:sp>
+      <p:sp>
+        <p:nvSpPr>
+          <p:cNvPr id="7" name="Text 5"/>
+          <p:cNvSpPr/>
+          <p:nvPr/>
+        </p:nvSpPr>
+        <p:spPr>
+          <a:xfrm>
+            <a:off x="274320" y="6720840"/>
+            <a:ext cx="2743200" cy="137160"/>
+          </a:xfrm>
+          <a:prstGeom prst="rect">
+            <a:avLst/>
+          </a:prstGeom>
+          <a:noFill/>
+          <a:ln/>
+        </p:spPr>
+        <p:txBody>
+          <a:bodyPr wrap="square" rtlCol="0" anchor="ctr"/>
+          <a:lstStyle/>
+          <a:p>
+            <a:pPr indent="0" marL="0">
+              <a:buNone/>
+            </a:pPr>
+            <a:r>
+              <a:rPr lang="en-US" sz="1000" dirty="0">
+                <a:solidFill>
+                  <a:srgbClr val="6B7280"/>
+                </a:solidFill>
+                <a:latin typeface="Calibri" pitchFamily="34" charset="0"/>
+                <a:ea typeface="Calibri" pitchFamily="34" charset="-122"/>
+                <a:cs typeface="Calibri" pitchFamily="34" charset="-120"/>
+              </a:rPr>
+              <a:t>Creatives Takeover</a:t>
+            </a:r>
+            <a:endParaRPr lang="en-US" sz="1000" dirty="0"/>
+          </a:p>
+        </p:txBody>
+      </p:sp>
+      <p:sp>
+        <p:nvSpPr>
+          <p:cNvPr id="8" name="Text 6"/>
+          <p:cNvSpPr/>
+          <p:nvPr/>
+        </p:nvSpPr>
+        <p:spPr>
+          <a:xfrm>
+            <a:off x="8412480" y="6720840"/>
+            <a:ext cx="274320" cy="137160"/>
+          </a:xfrm>
+          <a:prstGeom prst="rect">
+            <a:avLst/>
+          </a:prstGeom>
+          <a:noFill/>
+          <a:ln/>
+        </p:spPr>
+        <p:txBody>
+          <a:bodyPr wrap="square" rtlCol="0" anchor="ctr"/>
+          <a:lstStyle/>
+          <a:p>
+            <a:pPr algn="r" indent="0" marL="0">
+              <a:buNone/>
+            </a:pPr>
+            <a:r>
+              <a:rPr lang="en-US" sz="1000" dirty="0">
+                <a:solidFill>
+                  <a:srgbClr val="6B7280"/>
+                </a:solidFill>
+                <a:latin typeface="Calibri" pitchFamily="34" charset="0"/>
+                <a:ea typeface="Calibri" pitchFamily="34" charset="-122"/>
+                <a:cs typeface="Calibri" pitchFamily="34" charset="-120"/>
+              </a:rPr>
+              <a:t>7</a:t>
+            </a:r>
+            <a:endParaRPr lang="en-US" sz="1000" dirty="0"/>
           </a:p>
         </p:txBody>
       </p:sp>
@@ -3623,9 +5345,16 @@
 </p:sld>
 </file>
 
-<file path=ppt/slides/slide7.xml><?xml version="1.0" encoding="utf-8"?>
+<file path=ppt/slides/slide8.xml><?xml version="1.0" encoding="utf-8"?>
 <p:sld xmlns:a="http://schemas.openxmlformats.org/drawingml/2006/main" xmlns:r="http://schemas.openxmlformats.org/officeDocument/2006/relationships" xmlns:p="http://schemas.openxmlformats.org/presentationml/2006/main">
-  <p:cSld name="Slide 7">
+  <p:cSld name="Slide 8">
+    <p:bg>
+      <p:bgPr>
+        <a:solidFill>
+          <a:srgbClr val="FFFFFF"/>
+        </a:solidFill>
+      </p:bgPr>
+    </p:bg>
     <p:spTree>
       <p:nvGrpSpPr>
         <p:cNvPr id="1" name=""/>
@@ -3642,14 +5371,34 @@
       </p:grpSpPr>
       <p:sp>
         <p:nvSpPr>
-          <p:cNvPr id="2" name="Text 0"/>
-          <p:cNvSpPr/>
-          <p:nvPr/>
-        </p:nvSpPr>
-        <p:spPr>
-          <a:xfrm>
-            <a:off x="457200" y="457200"/>
-            <a:ext cx="8229600" cy="685800"/>
+          <p:cNvPr id="2" name="Shape 0"/>
+          <p:cNvSpPr/>
+          <p:nvPr/>
+        </p:nvSpPr>
+        <p:spPr>
+          <a:xfrm>
+            <a:off x="0" y="0"/>
+            <a:ext cx="9144000" cy="137160"/>
+          </a:xfrm>
+          <a:prstGeom prst="rect">
+            <a:avLst/>
+          </a:prstGeom>
+          <a:solidFill>
+            <a:srgbClr val="0B1437"/>
+          </a:solidFill>
+          <a:ln/>
+        </p:spPr>
+      </p:sp>
+      <p:sp>
+        <p:nvSpPr>
+          <p:cNvPr id="3" name="Text 1"/>
+          <p:cNvSpPr/>
+          <p:nvPr/>
+        </p:nvSpPr>
+        <p:spPr>
+          <a:xfrm>
+            <a:off x="457200" y="365760"/>
+            <a:ext cx="8229600" cy="548640"/>
           </a:xfrm>
           <a:prstGeom prst="rect">
             <a:avLst/>
@@ -3669,8 +5418,11 @@
                 <a:solidFill>
                   <a:srgbClr val="0B1437"/>
                 </a:solidFill>
-              </a:rPr>
-              <a:t>Customer Success</a:t>
+                <a:latin typeface="Calibri" pitchFamily="34" charset="0"/>
+                <a:ea typeface="Calibri" pitchFamily="34" charset="-122"/>
+                <a:cs typeface="Calibri" pitchFamily="34" charset="-120"/>
+              </a:rPr>
+              <a:t>Traction &amp; Customers</a:t>
             </a:r>
             <a:endParaRPr lang="en-US" sz="3200" dirty="0"/>
           </a:p>
@@ -3678,7 +5430,46 @@
       </p:sp>
       <p:sp>
         <p:nvSpPr>
-          <p:cNvPr id="3" name="Text 1"/>
+          <p:cNvPr id="4" name="Text 2"/>
+          <p:cNvSpPr/>
+          <p:nvPr/>
+        </p:nvSpPr>
+        <p:spPr>
+          <a:xfrm>
+            <a:off x="457200" y="914400"/>
+            <a:ext cx="8229600" cy="365760"/>
+          </a:xfrm>
+          <a:prstGeom prst="rect">
+            <a:avLst/>
+          </a:prstGeom>
+          <a:noFill/>
+          <a:ln/>
+        </p:spPr>
+        <p:txBody>
+          <a:bodyPr wrap="square" rtlCol="0" anchor="ctr"/>
+          <a:lstStyle/>
+          <a:p>
+            <a:pPr indent="0" marL="0">
+              <a:buNone/>
+            </a:pPr>
+            <a:r>
+              <a:rPr lang="en-US" sz="1600" i="1" dirty="0">
+                <a:solidFill>
+                  <a:srgbClr val="6B7280"/>
+                </a:solidFill>
+                <a:latin typeface="Calibri" pitchFamily="34" charset="0"/>
+                <a:ea typeface="Calibri" pitchFamily="34" charset="-122"/>
+                <a:cs typeface="Calibri" pitchFamily="34" charset="-120"/>
+              </a:rPr>
+              <a:t>Proven with enterprise clients</a:t>
+            </a:r>
+            <a:endParaRPr lang="en-US" sz="1600" dirty="0"/>
+          </a:p>
+        </p:txBody>
+      </p:sp>
+      <p:sp>
+        <p:nvSpPr>
+          <p:cNvPr id="5" name="Text 3"/>
           <p:cNvSpPr/>
           <p:nvPr/>
         </p:nvSpPr>
@@ -3705,14 +5496,17 @@
               <a:buChar char="•"/>
             </a:pPr>
             <a:r>
-              <a:rPr lang="en-US" sz="1600" dirty="0">
-                <a:solidFill>
-                  <a:srgbClr val="374151"/>
-                </a:solidFill>
-              </a:rPr>
-              <a:t>Customer logos</a:t>
-            </a:r>
-            <a:endParaRPr lang="en-US" sz="1600" dirty="0"/>
+              <a:rPr lang="en-US" sz="1800" b="1" dirty="0">
+                <a:solidFill>
+                  <a:srgbClr val="1F2937"/>
+                </a:solidFill>
+                <a:latin typeface="Calibri" pitchFamily="34" charset="0"/>
+                <a:ea typeface="Calibri" pitchFamily="34" charset="-122"/>
+                <a:cs typeface="Calibri" pitchFamily="34" charset="-120"/>
+              </a:rPr>
+              <a:t>25 enterprise customers including 3 Fortune 500 companies</a:t>
+            </a:r>
+            <a:endParaRPr lang="en-US" sz="1800" dirty="0"/>
           </a:p>
           <a:p>
             <a:pPr marL="342900" indent="-342900">
@@ -3723,14 +5517,17 @@
               <a:buChar char="•"/>
             </a:pPr>
             <a:r>
-              <a:rPr lang="en-US" sz="1600" dirty="0">
-                <a:solidFill>
-                  <a:srgbClr val="374151"/>
-                </a:solidFill>
-              </a:rPr>
-              <a:t>Use case examples</a:t>
-            </a:r>
-            <a:endParaRPr lang="en-US" sz="1600" dirty="0"/>
+              <a:rPr lang="en-US" sz="1800" b="1" dirty="0">
+                <a:solidFill>
+                  <a:srgbClr val="1F2937"/>
+                </a:solidFill>
+                <a:latin typeface="Calibri" pitchFamily="34" charset="0"/>
+                <a:ea typeface="Calibri" pitchFamily="34" charset="-122"/>
+                <a:cs typeface="Calibri" pitchFamily="34" charset="-120"/>
+              </a:rPr>
+              <a:t>$2M ARR with 150% year-over-year growth</a:t>
+            </a:r>
+            <a:endParaRPr lang="en-US" sz="1800" dirty="0"/>
           </a:p>
           <a:p>
             <a:pPr marL="342900" indent="-342900">
@@ -3741,14 +5538,17 @@
               <a:buChar char="•"/>
             </a:pPr>
             <a:r>
-              <a:rPr lang="en-US" sz="1600" dirty="0">
-                <a:solidFill>
-                  <a:srgbClr val="374151"/>
-                </a:solidFill>
-              </a:rPr>
-              <a:t>ROI achieved</a:t>
-            </a:r>
-            <a:endParaRPr lang="en-US" sz="1600" dirty="0"/>
+              <a:rPr lang="en-US" sz="1800" b="1" dirty="0">
+                <a:solidFill>
+                  <a:srgbClr val="1F2937"/>
+                </a:solidFill>
+                <a:latin typeface="Calibri" pitchFamily="34" charset="0"/>
+                <a:ea typeface="Calibri" pitchFamily="34" charset="-122"/>
+                <a:cs typeface="Calibri" pitchFamily="34" charset="-120"/>
+              </a:rPr>
+              <a:t>135% Net Dollar Retention (customers expand over time)</a:t>
+            </a:r>
+            <a:endParaRPr lang="en-US" sz="1800" dirty="0"/>
           </a:p>
           <a:p>
             <a:pPr marL="342900" indent="-342900">
@@ -3759,14 +5559,157 @@
               <a:buChar char="•"/>
             </a:pPr>
             <a:r>
-              <a:rPr lang="en-US" sz="1600" dirty="0">
-                <a:solidFill>
-                  <a:srgbClr val="374151"/>
-                </a:solidFill>
-              </a:rPr>
-              <a:t>Testimonials with metrics</a:t>
-            </a:r>
-            <a:endParaRPr lang="en-US" sz="1600" dirty="0"/>
+              <a:rPr lang="en-US" sz="1800" b="1" dirty="0">
+                <a:solidFill>
+                  <a:srgbClr val="1F2937"/>
+                </a:solidFill>
+                <a:latin typeface="Calibri" pitchFamily="34" charset="0"/>
+                <a:ea typeface="Calibri" pitchFamily="34" charset="-122"/>
+                <a:cs typeface="Calibri" pitchFamily="34" charset="-120"/>
+              </a:rPr>
+              <a:t>Logo highlights:</a:t>
+            </a:r>
+            <a:endParaRPr lang="en-US" sz="1800" dirty="0"/>
+          </a:p>
+          <a:p>
+            <a:pPr lvl="1" marL="685800" indent="-342900">
+              <a:lnSpc>
+                <a:spcPts val="2800"/>
+              </a:lnSpc>
+              <a:buSzPct val="100000"/>
+              <a:buChar char="•"/>
+            </a:pPr>
+            <a:r>
+              <a:rPr lang="en-US" sz="1800" dirty="0">
+                <a:solidFill>
+                  <a:srgbClr val="6B7280"/>
+                </a:solidFill>
+                <a:latin typeface="Calibri" pitchFamily="34" charset="0"/>
+                <a:ea typeface="Calibri" pitchFamily="34" charset="-122"/>
+                <a:cs typeface="Calibri" pitchFamily="34" charset="-120"/>
+              </a:rPr>
+              <a:t>Acme Corp (2,000 employees): $250K annual contract, 95% adoption</a:t>
+            </a:r>
+            <a:endParaRPr lang="en-US" sz="1800" dirty="0"/>
+          </a:p>
+          <a:p>
+            <a:pPr lvl="1" marL="685800" indent="-342900">
+              <a:lnSpc>
+                <a:spcPts val="2800"/>
+              </a:lnSpc>
+              <a:buSzPct val="100000"/>
+              <a:buChar char="•"/>
+            </a:pPr>
+            <a:r>
+              <a:rPr lang="en-US" sz="1800" dirty="0">
+                <a:solidFill>
+                  <a:srgbClr val="6B7280"/>
+                </a:solidFill>
+                <a:latin typeface="Calibri" pitchFamily="34" charset="0"/>
+                <a:ea typeface="Calibri" pitchFamily="34" charset="-122"/>
+                <a:cs typeface="Calibri" pitchFamily="34" charset="-120"/>
+              </a:rPr>
+              <a:t>TechGiant Inc (10,000 employees): $500K contract, expanding to 3 more divisions</a:t>
+            </a:r>
+            <a:endParaRPr lang="en-US" sz="1800" dirty="0"/>
+          </a:p>
+        </p:txBody>
+      </p:sp>
+      <p:sp>
+        <p:nvSpPr>
+          <p:cNvPr id="6" name="Shape 4"/>
+          <p:cNvSpPr/>
+          <p:nvPr/>
+        </p:nvSpPr>
+        <p:spPr>
+          <a:xfrm>
+            <a:off x="0" y="6720840"/>
+            <a:ext cx="73152" cy="137160"/>
+          </a:xfrm>
+          <a:prstGeom prst="rect">
+            <a:avLst/>
+          </a:prstGeom>
+          <a:solidFill>
+            <a:srgbClr val="38BDF8"/>
+          </a:solidFill>
+          <a:ln/>
+        </p:spPr>
+      </p:sp>
+      <p:sp>
+        <p:nvSpPr>
+          <p:cNvPr id="7" name="Text 5"/>
+          <p:cNvSpPr/>
+          <p:nvPr/>
+        </p:nvSpPr>
+        <p:spPr>
+          <a:xfrm>
+            <a:off x="274320" y="6720840"/>
+            <a:ext cx="2743200" cy="137160"/>
+          </a:xfrm>
+          <a:prstGeom prst="rect">
+            <a:avLst/>
+          </a:prstGeom>
+          <a:noFill/>
+          <a:ln/>
+        </p:spPr>
+        <p:txBody>
+          <a:bodyPr wrap="square" rtlCol="0" anchor="ctr"/>
+          <a:lstStyle/>
+          <a:p>
+            <a:pPr indent="0" marL="0">
+              <a:buNone/>
+            </a:pPr>
+            <a:r>
+              <a:rPr lang="en-US" sz="1000" dirty="0">
+                <a:solidFill>
+                  <a:srgbClr val="6B7280"/>
+                </a:solidFill>
+                <a:latin typeface="Calibri" pitchFamily="34" charset="0"/>
+                <a:ea typeface="Calibri" pitchFamily="34" charset="-122"/>
+                <a:cs typeface="Calibri" pitchFamily="34" charset="-120"/>
+              </a:rPr>
+              <a:t>Creatives Takeover</a:t>
+            </a:r>
+            <a:endParaRPr lang="en-US" sz="1000" dirty="0"/>
+          </a:p>
+        </p:txBody>
+      </p:sp>
+      <p:sp>
+        <p:nvSpPr>
+          <p:cNvPr id="8" name="Text 6"/>
+          <p:cNvSpPr/>
+          <p:nvPr/>
+        </p:nvSpPr>
+        <p:spPr>
+          <a:xfrm>
+            <a:off x="8412480" y="6720840"/>
+            <a:ext cx="274320" cy="137160"/>
+          </a:xfrm>
+          <a:prstGeom prst="rect">
+            <a:avLst/>
+          </a:prstGeom>
+          <a:noFill/>
+          <a:ln/>
+        </p:spPr>
+        <p:txBody>
+          <a:bodyPr wrap="square" rtlCol="0" anchor="ctr"/>
+          <a:lstStyle/>
+          <a:p>
+            <a:pPr algn="r" indent="0" marL="0">
+              <a:buNone/>
+            </a:pPr>
+            <a:r>
+              <a:rPr lang="en-US" sz="1000" dirty="0">
+                <a:solidFill>
+                  <a:srgbClr val="6B7280"/>
+                </a:solidFill>
+                <a:latin typeface="Calibri" pitchFamily="34" charset="0"/>
+                <a:ea typeface="Calibri" pitchFamily="34" charset="-122"/>
+                <a:cs typeface="Calibri" pitchFamily="34" charset="-120"/>
+              </a:rPr>
+              <a:t>8</a:t>
+            </a:r>
+            <a:endParaRPr lang="en-US" sz="1000" dirty="0"/>
           </a:p>
         </p:txBody>
       </p:sp>
@@ -3778,9 +5721,16 @@
 </p:sld>
 </file>
 
-<file path=ppt/slides/slide8.xml><?xml version="1.0" encoding="utf-8"?>
+<file path=ppt/slides/slide9.xml><?xml version="1.0" encoding="utf-8"?>
 <p:sld xmlns:a="http://schemas.openxmlformats.org/drawingml/2006/main" xmlns:r="http://schemas.openxmlformats.org/officeDocument/2006/relationships" xmlns:p="http://schemas.openxmlformats.org/presentationml/2006/main">
-  <p:cSld name="Slide 8">
+  <p:cSld name="Slide 9">
+    <p:bg>
+      <p:bgPr>
+        <a:solidFill>
+          <a:srgbClr val="FFFFFF"/>
+        </a:solidFill>
+      </p:bgPr>
+    </p:bg>
     <p:spTree>
       <p:nvGrpSpPr>
         <p:cNvPr id="1" name=""/>
@@ -3797,14 +5747,34 @@
       </p:grpSpPr>
       <p:sp>
         <p:nvSpPr>
-          <p:cNvPr id="2" name="Text 0"/>
-          <p:cNvSpPr/>
-          <p:nvPr/>
-        </p:nvSpPr>
-        <p:spPr>
-          <a:xfrm>
-            <a:off x="457200" y="457200"/>
-            <a:ext cx="8229600" cy="685800"/>
+          <p:cNvPr id="2" name="Shape 0"/>
+          <p:cNvSpPr/>
+          <p:nvPr/>
+        </p:nvSpPr>
+        <p:spPr>
+          <a:xfrm>
+            <a:off x="0" y="0"/>
+            <a:ext cx="9144000" cy="137160"/>
+          </a:xfrm>
+          <a:prstGeom prst="rect">
+            <a:avLst/>
+          </a:prstGeom>
+          <a:solidFill>
+            <a:srgbClr val="0B1437"/>
+          </a:solidFill>
+          <a:ln/>
+        </p:spPr>
+      </p:sp>
+      <p:sp>
+        <p:nvSpPr>
+          <p:cNvPr id="3" name="Text 1"/>
+          <p:cNvSpPr/>
+          <p:nvPr/>
+        </p:nvSpPr>
+        <p:spPr>
+          <a:xfrm>
+            <a:off x="457200" y="365760"/>
+            <a:ext cx="8229600" cy="548640"/>
           </a:xfrm>
           <a:prstGeom prst="rect">
             <a:avLst/>
@@ -3824,8 +5794,11 @@
                 <a:solidFill>
                   <a:srgbClr val="0B1437"/>
                 </a:solidFill>
-              </a:rPr>
-              <a:t>Market Opportunity</a:t>
+                <a:latin typeface="Calibri" pitchFamily="34" charset="0"/>
+                <a:ea typeface="Calibri" pitchFamily="34" charset="-122"/>
+                <a:cs typeface="Calibri" pitchFamily="34" charset="-120"/>
+              </a:rPr>
+              <a:t>Customer Success Story</a:t>
             </a:r>
             <a:endParaRPr lang="en-US" sz="3200" dirty="0"/>
           </a:p>
@@ -3833,7 +5806,46 @@
       </p:sp>
       <p:sp>
         <p:nvSpPr>
-          <p:cNvPr id="3" name="Text 1"/>
+          <p:cNvPr id="4" name="Text 2"/>
+          <p:cNvSpPr/>
+          <p:nvPr/>
+        </p:nvSpPr>
+        <p:spPr>
+          <a:xfrm>
+            <a:off x="457200" y="914400"/>
+            <a:ext cx="8229600" cy="365760"/>
+          </a:xfrm>
+          <a:prstGeom prst="rect">
+            <a:avLst/>
+          </a:prstGeom>
+          <a:noFill/>
+          <a:ln/>
+        </p:spPr>
+        <p:txBody>
+          <a:bodyPr wrap="square" rtlCol="0" anchor="ctr"/>
+          <a:lstStyle/>
+          <a:p>
+            <a:pPr indent="0" marL="0">
+              <a:buNone/>
+            </a:pPr>
+            <a:r>
+              <a:rPr lang="en-US" sz="1600" i="1" dirty="0">
+                <a:solidFill>
+                  <a:srgbClr val="6B7280"/>
+                </a:solidFill>
+                <a:latin typeface="Calibri" pitchFamily="34" charset="0"/>
+                <a:ea typeface="Calibri" pitchFamily="34" charset="-122"/>
+                <a:cs typeface="Calibri" pitchFamily="34" charset="-120"/>
+              </a:rPr>
+              <a:t>Case study: Acme Corp</a:t>
+            </a:r>
+            <a:endParaRPr lang="en-US" sz="1600" dirty="0"/>
+          </a:p>
+        </p:txBody>
+      </p:sp>
+      <p:sp>
+        <p:nvSpPr>
+          <p:cNvPr id="5" name="Text 3"/>
           <p:cNvSpPr/>
           <p:nvPr/>
         </p:nvSpPr>
@@ -3860,14 +5872,17 @@
               <a:buChar char="•"/>
             </a:pPr>
             <a:r>
-              <a:rPr lang="en-US" sz="1600" dirty="0">
-                <a:solidFill>
-                  <a:srgbClr val="374151"/>
-                </a:solidFill>
-              </a:rPr>
-              <a:t>Total addressable market</a:t>
-            </a:r>
-            <a:endParaRPr lang="en-US" sz="1600" dirty="0"/>
+              <a:rPr lang="en-US" sz="1800" b="1" dirty="0">
+                <a:solidFill>
+                  <a:srgbClr val="1F2937"/>
+                </a:solidFill>
+                <a:latin typeface="Calibri" pitchFamily="34" charset="0"/>
+                <a:ea typeface="Calibri" pitchFamily="34" charset="-122"/>
+                <a:cs typeface="Calibri" pitchFamily="34" charset="-120"/>
+              </a:rPr>
+              <a:t>Challenge: Manual processes cost $800K/year and 40% error rate</a:t>
+            </a:r>
+            <a:endParaRPr lang="en-US" sz="1800" dirty="0"/>
           </a:p>
           <a:p>
             <a:pPr marL="342900" indent="-342900">
@@ -3878,14 +5893,17 @@
               <a:buChar char="•"/>
             </a:pPr>
             <a:r>
-              <a:rPr lang="en-US" sz="1600" dirty="0">
-                <a:solidFill>
-                  <a:srgbClr val="374151"/>
-                </a:solidFill>
-              </a:rPr>
-              <a:t>Serviceable market</a:t>
-            </a:r>
-            <a:endParaRPr lang="en-US" sz="1600" dirty="0"/>
+              <a:rPr lang="en-US" sz="1800" b="1" dirty="0">
+                <a:solidFill>
+                  <a:srgbClr val="1F2937"/>
+                </a:solidFill>
+                <a:latin typeface="Calibri" pitchFamily="34" charset="0"/>
+                <a:ea typeface="Calibri" pitchFamily="34" charset="-122"/>
+                <a:cs typeface="Calibri" pitchFamily="34" charset="-120"/>
+              </a:rPr>
+              <a:t>Solution: Deployed our platform across 5 departments in 30 days</a:t>
+            </a:r>
+            <a:endParaRPr lang="en-US" sz="1800" dirty="0"/>
           </a:p>
           <a:p>
             <a:pPr marL="342900" indent="-342900">
@@ -3896,70 +5914,134 @@
               <a:buChar char="•"/>
             </a:pPr>
             <a:r>
-              <a:rPr lang="en-US" sz="1600" dirty="0">
-                <a:solidFill>
-                  <a:srgbClr val="374151"/>
-                </a:solidFill>
-              </a:rPr>
-              <a:t>Current penetration</a:t>
-            </a:r>
-            <a:endParaRPr lang="en-US" sz="1600" dirty="0"/>
-          </a:p>
-          <a:p>
-            <a:pPr marL="342900" indent="-342900">
-              <a:lnSpc>
-                <a:spcPts val="2800"/>
-              </a:lnSpc>
-              <a:buSzPct val="100000"/>
-              <a:buChar char="•"/>
-            </a:pPr>
-            <a:r>
-              <a:rPr lang="en-US" sz="1600" dirty="0">
-                <a:solidFill>
-                  <a:srgbClr val="374151"/>
-                </a:solidFill>
-              </a:rPr>
-              <a:t>Market growth rate</a:t>
-            </a:r>
-            <a:endParaRPr lang="en-US" sz="1600" dirty="0"/>
-          </a:p>
-        </p:txBody>
-      </p:sp>
-    </p:spTree>
-  </p:cSld>
-  <p:clrMapOvr>
-    <a:masterClrMapping/>
-  </p:clrMapOvr>
-</p:sld>
-</file>
-
-<file path=ppt/slides/slide9.xml><?xml version="1.0" encoding="utf-8"?>
-<p:sld xmlns:a="http://schemas.openxmlformats.org/drawingml/2006/main" xmlns:r="http://schemas.openxmlformats.org/officeDocument/2006/relationships" xmlns:p="http://schemas.openxmlformats.org/presentationml/2006/main">
-  <p:cSld name="Slide 9">
-    <p:spTree>
-      <p:nvGrpSpPr>
-        <p:cNvPr id="1" name=""/>
-        <p:cNvGrpSpPr/>
-        <p:nvPr/>
-      </p:nvGrpSpPr>
-      <p:grpSpPr>
-        <a:xfrm>
-          <a:off x="0" y="0"/>
-          <a:ext cx="0" cy="0"/>
-          <a:chOff x="0" y="0"/>
-          <a:chExt cx="0" cy="0"/>
-        </a:xfrm>
-      </p:grpSpPr>
-      <p:sp>
-        <p:nvSpPr>
-          <p:cNvPr id="2" name="Text 0"/>
-          <p:cNvSpPr/>
-          <p:nvPr/>
-        </p:nvSpPr>
-        <p:spPr>
-          <a:xfrm>
-            <a:off x="457200" y="457200"/>
-            <a:ext cx="8229600" cy="685800"/>
+              <a:rPr lang="en-US" sz="1800" b="1" dirty="0">
+                <a:solidFill>
+                  <a:srgbClr val="1F2937"/>
+                </a:solidFill>
+                <a:latin typeface="Calibri" pitchFamily="34" charset="0"/>
+                <a:ea typeface="Calibri" pitchFamily="34" charset="-122"/>
+                <a:cs typeface="Calibri" pitchFamily="34" charset="-120"/>
+              </a:rPr>
+              <a:t>Results after 6 months:</a:t>
+            </a:r>
+            <a:endParaRPr lang="en-US" sz="1800" dirty="0"/>
+          </a:p>
+          <a:p>
+            <a:pPr lvl="1" marL="685800" indent="-342900">
+              <a:lnSpc>
+                <a:spcPts val="2800"/>
+              </a:lnSpc>
+              <a:buSzPct val="100000"/>
+              <a:buChar char="•"/>
+            </a:pPr>
+            <a:r>
+              <a:rPr lang="en-US" sz="1800" dirty="0">
+                <a:solidFill>
+                  <a:srgbClr val="10B981"/>
+                </a:solidFill>
+                <a:latin typeface="Calibri" pitchFamily="34" charset="0"/>
+                <a:ea typeface="Calibri" pitchFamily="34" charset="-122"/>
+                <a:cs typeface="Calibri" pitchFamily="34" charset="-120"/>
+              </a:rPr>
+              <a:t>$600K annual savings (75% cost reduction)</a:t>
+            </a:r>
+            <a:endParaRPr lang="en-US" sz="1800" dirty="0"/>
+          </a:p>
+          <a:p>
+            <a:pPr lvl="1" marL="685800" indent="-342900">
+              <a:lnSpc>
+                <a:spcPts val="2800"/>
+              </a:lnSpc>
+              <a:buSzPct val="100000"/>
+              <a:buChar char="•"/>
+            </a:pPr>
+            <a:r>
+              <a:rPr lang="en-US" sz="1800" dirty="0">
+                <a:solidFill>
+                  <a:srgbClr val="10B981"/>
+                </a:solidFill>
+                <a:latin typeface="Calibri" pitchFamily="34" charset="0"/>
+                <a:ea typeface="Calibri" pitchFamily="34" charset="-122"/>
+                <a:cs typeface="Calibri" pitchFamily="34" charset="-120"/>
+              </a:rPr>
+              <a:t>Error rate reduced from 40% to 2%</a:t>
+            </a:r>
+            <a:endParaRPr lang="en-US" sz="1800" dirty="0"/>
+          </a:p>
+          <a:p>
+            <a:pPr lvl="1" marL="685800" indent="-342900">
+              <a:lnSpc>
+                <a:spcPts val="2800"/>
+              </a:lnSpc>
+              <a:buSzPct val="100000"/>
+              <a:buChar char="•"/>
+            </a:pPr>
+            <a:r>
+              <a:rPr lang="en-US" sz="1800" dirty="0">
+                <a:solidFill>
+                  <a:srgbClr val="10B981"/>
+                </a:solidFill>
+                <a:latin typeface="Calibri" pitchFamily="34" charset="0"/>
+                <a:ea typeface="Calibri" pitchFamily="34" charset="-122"/>
+                <a:cs typeface="Calibri" pitchFamily="34" charset="-120"/>
+              </a:rPr>
+              <a:t>Team productivity increased 3x</a:t>
+            </a:r>
+            <a:endParaRPr lang="en-US" sz="1800" dirty="0"/>
+          </a:p>
+          <a:p>
+            <a:pPr lvl="1" marL="685800" indent="-342900">
+              <a:lnSpc>
+                <a:spcPts val="2800"/>
+              </a:lnSpc>
+              <a:buSzPct val="100000"/>
+              <a:buChar char="•"/>
+            </a:pPr>
+            <a:r>
+              <a:rPr lang="en-US" sz="1800" dirty="0">
+                <a:solidFill>
+                  <a:srgbClr val="10B981"/>
+                </a:solidFill>
+                <a:latin typeface="Calibri" pitchFamily="34" charset="0"/>
+                <a:ea typeface="Calibri" pitchFamily="34" charset="-122"/>
+                <a:cs typeface="Calibri" pitchFamily="34" charset="-120"/>
+              </a:rPr>
+              <a:t>ROI: 400% in first year</a:t>
+            </a:r>
+            <a:endParaRPr lang="en-US" sz="1800" dirty="0"/>
+          </a:p>
+        </p:txBody>
+      </p:sp>
+      <p:sp>
+        <p:nvSpPr>
+          <p:cNvPr id="6" name="Shape 4"/>
+          <p:cNvSpPr/>
+          <p:nvPr/>
+        </p:nvSpPr>
+        <p:spPr>
+          <a:xfrm>
+            <a:off x="0" y="6720840"/>
+            <a:ext cx="73152" cy="137160"/>
+          </a:xfrm>
+          <a:prstGeom prst="rect">
+            <a:avLst/>
+          </a:prstGeom>
+          <a:solidFill>
+            <a:srgbClr val="38BDF8"/>
+          </a:solidFill>
+          <a:ln/>
+        </p:spPr>
+      </p:sp>
+      <p:sp>
+        <p:nvSpPr>
+          <p:cNvPr id="7" name="Text 5"/>
+          <p:cNvSpPr/>
+          <p:nvPr/>
+        </p:nvSpPr>
+        <p:spPr>
+          <a:xfrm>
+            <a:off x="274320" y="6720840"/>
+            <a:ext cx="2743200" cy="137160"/>
           </a:xfrm>
           <a:prstGeom prst="rect">
             <a:avLst/>
@@ -3975,27 +6057,30 @@
               <a:buNone/>
             </a:pPr>
             <a:r>
-              <a:rPr lang="en-US" sz="3200" b="1" dirty="0">
-                <a:solidFill>
-                  <a:srgbClr val="0B1437"/>
-                </a:solidFill>
-              </a:rPr>
-              <a:t>Business Model</a:t>
-            </a:r>
-            <a:endParaRPr lang="en-US" sz="3200" dirty="0"/>
-          </a:p>
-        </p:txBody>
-      </p:sp>
-      <p:sp>
-        <p:nvSpPr>
-          <p:cNvPr id="3" name="Text 1"/>
-          <p:cNvSpPr/>
-          <p:nvPr/>
-        </p:nvSpPr>
-        <p:spPr>
-          <a:xfrm>
-            <a:off x="457200" y="1371600"/>
-            <a:ext cx="8229600" cy="4114800"/>
+              <a:rPr lang="en-US" sz="1000" dirty="0">
+                <a:solidFill>
+                  <a:srgbClr val="6B7280"/>
+                </a:solidFill>
+                <a:latin typeface="Calibri" pitchFamily="34" charset="0"/>
+                <a:ea typeface="Calibri" pitchFamily="34" charset="-122"/>
+                <a:cs typeface="Calibri" pitchFamily="34" charset="-120"/>
+              </a:rPr>
+              <a:t>Creatives Takeover</a:t>
+            </a:r>
+            <a:endParaRPr lang="en-US" sz="1000" dirty="0"/>
+          </a:p>
+        </p:txBody>
+      </p:sp>
+      <p:sp>
+        <p:nvSpPr>
+          <p:cNvPr id="8" name="Text 6"/>
+          <p:cNvSpPr/>
+          <p:nvPr/>
+        </p:nvSpPr>
+        <p:spPr>
+          <a:xfrm>
+            <a:off x="8412480" y="6720840"/>
+            <a:ext cx="274320" cy="137160"/>
           </a:xfrm>
           <a:prstGeom prst="rect">
             <a:avLst/>
@@ -4007,112 +6092,21 @@
           <a:bodyPr wrap="square" rtlCol="0" anchor="ctr"/>
           <a:lstStyle/>
           <a:p>
-            <a:pPr marL="342900" indent="-342900">
-              <a:lnSpc>
-                <a:spcPts val="2800"/>
-              </a:lnSpc>
-              <a:buSzPct val="100000"/>
-              <a:buChar char="•"/>
-            </a:pPr>
-            <a:r>
-              <a:rPr lang="en-US" sz="1600" dirty="0">
-                <a:solidFill>
-                  <a:srgbClr val="374151"/>
-                </a:solidFill>
-              </a:rPr>
-              <a:t>Pricing tiers</a:t>
-            </a:r>
-            <a:endParaRPr lang="en-US" sz="1600" dirty="0"/>
-          </a:p>
-          <a:p>
-            <a:pPr marL="342900" indent="-342900">
-              <a:lnSpc>
-                <a:spcPts val="2800"/>
-              </a:lnSpc>
-              <a:buSzPct val="100000"/>
-              <a:buChar char="•"/>
-            </a:pPr>
-            <a:r>
-              <a:rPr lang="en-US" sz="1600" dirty="0">
-                <a:solidFill>
-                  <a:srgbClr val="374151"/>
-                </a:solidFill>
-              </a:rPr>
-              <a:t>ARR/MRR</a:t>
-            </a:r>
-            <a:endParaRPr lang="en-US" sz="1600" dirty="0"/>
-          </a:p>
-          <a:p>
-            <a:pPr marL="342900" indent="-342900">
-              <a:lnSpc>
-                <a:spcPts val="2800"/>
-              </a:lnSpc>
-              <a:buSzPct val="100000"/>
-              <a:buChar char="•"/>
-            </a:pPr>
-            <a:r>
-              <a:rPr lang="en-US" sz="1600" dirty="0">
-                <a:solidFill>
-                  <a:srgbClr val="374151"/>
-                </a:solidFill>
-              </a:rPr>
-              <a:t>Net revenue retention</a:t>
-            </a:r>
-            <a:endParaRPr lang="en-US" sz="1600" dirty="0"/>
-          </a:p>
-          <a:p>
-            <a:pPr marL="342900" indent="-342900">
-              <a:lnSpc>
-                <a:spcPts val="2800"/>
-              </a:lnSpc>
-              <a:buSzPct val="100000"/>
-              <a:buChar char="•"/>
-            </a:pPr>
-            <a:r>
-              <a:rPr lang="en-US" sz="1600" dirty="0">
-                <a:solidFill>
-                  <a:srgbClr val="374151"/>
-                </a:solidFill>
-              </a:rPr>
-              <a:t>CAC payback period</a:t>
-            </a:r>
-            <a:endParaRPr lang="en-US" sz="1600" dirty="0"/>
-          </a:p>
-          <a:p>
-            <a:pPr marL="342900" indent="-342900">
-              <a:lnSpc>
-                <a:spcPts val="2800"/>
-              </a:lnSpc>
-              <a:buSzPct val="100000"/>
-              <a:buChar char="•"/>
-            </a:pPr>
-            <a:r>
-              <a:rPr lang="en-US" sz="1600" dirty="0">
-                <a:solidFill>
-                  <a:srgbClr val="374151"/>
-                </a:solidFill>
-              </a:rPr>
-              <a:t>LTV:CAC ratio</a:t>
-            </a:r>
-            <a:endParaRPr lang="en-US" sz="1600" dirty="0"/>
-          </a:p>
-          <a:p>
-            <a:pPr marL="342900" indent="-342900">
-              <a:lnSpc>
-                <a:spcPts val="2800"/>
-              </a:lnSpc>
-              <a:buSzPct val="100000"/>
-              <a:buChar char="•"/>
-            </a:pPr>
-            <a:r>
-              <a:rPr lang="en-US" sz="1600" dirty="0">
-                <a:solidFill>
-                  <a:srgbClr val="374151"/>
-                </a:solidFill>
-              </a:rPr>
-              <a:t>Gross margin</a:t>
-            </a:r>
-            <a:endParaRPr lang="en-US" sz="1600" dirty="0"/>
+            <a:pPr algn="r" indent="0" marL="0">
+              <a:buNone/>
+            </a:pPr>
+            <a:r>
+              <a:rPr lang="en-US" sz="1000" dirty="0">
+                <a:solidFill>
+                  <a:srgbClr val="6B7280"/>
+                </a:solidFill>
+                <a:latin typeface="Calibri" pitchFamily="34" charset="0"/>
+                <a:ea typeface="Calibri" pitchFamily="34" charset="-122"/>
+                <a:cs typeface="Calibri" pitchFamily="34" charset="-120"/>
+              </a:rPr>
+              <a:t>9</a:t>
+            </a:r>
+            <a:endParaRPr lang="en-US" sz="1000" dirty="0"/>
           </a:p>
         </p:txBody>
       </p:sp>
